--- a/lectures/07-Emulator.pptx
+++ b/lectures/07-Emulator.pptx
@@ -216,7 +216,7 @@
           <a:p>
             <a:fld id="{18F5FDA9-B11F-7449-B169-793ADA47A6B8}" type="datetimeFigureOut">
               <a:rPr lang="en-US" smtClean="0"/>
-              <a:t>1/7/26</a:t>
+              <a:t>3/22/26</a:t>
             </a:fld>
             <a:endParaRPr lang="en-US"/>
           </a:p>
@@ -697,40 +697,8 @@
           <a:p>
             <a:r>
               <a:rPr lang="en-US" dirty="0"/>
-              <a:t>https://</a:t>
-            </a:r>
-            <a:r>
-              <a:rPr lang="en-US" dirty="0" err="1"/>
-              <a:t>archive.org</a:t>
-            </a:r>
-            <a:r>
-              <a:rPr lang="en-US" dirty="0"/>
-              <a:t>/details/atari_2600_space_invaders_1980_atari_richard_maurer_-_sears_cx2632_-_49-75153</a:t>
-            </a:r>
-          </a:p>
-          <a:p>
-            <a:r>
-              <a:rPr lang="en-US" dirty="0"/>
-              <a:t>Press 2 to start game</a:t>
-            </a:r>
-          </a:p>
-          <a:p>
-            <a:r>
-              <a:rPr lang="en-US" dirty="0"/>
-              <a:t>Arrows Left right</a:t>
-            </a:r>
-          </a:p>
-          <a:p>
-            <a:r>
-              <a:rPr lang="en-US" dirty="0"/>
-              <a:t>Left Control fire</a:t>
-            </a:r>
-          </a:p>
-          <a:p>
-            <a:endParaRPr lang="en-US" dirty="0"/>
-          </a:p>
-          <a:p>
-            <a:endParaRPr lang="en-US" dirty="0"/>
+              <a:t>A screen shot of the CDC6504 Emulator halted after the program to add 27 + 15 and print out asterisk (ASCII code 42).</a:t>
+            </a:r>
           </a:p>
         </p:txBody>
       </p:sp>
@@ -751,7 +719,7 @@
           <a:p>
             <a:fld id="{E556CA6E-FF8B-CA4B-9680-EA2F986E67B7}" type="slidenum">
               <a:rPr lang="en-US" smtClean="0"/>
-              <a:t>8</a:t>
+              <a:t>4</a:t>
             </a:fld>
             <a:endParaRPr lang="en-US"/>
           </a:p>
@@ -760,7 +728,7 @@
     </p:spTree>
     <p:extLst>
       <p:ext uri="{BB962C8B-B14F-4D97-AF65-F5344CB8AC3E}">
-        <p14:creationId xmlns:p14="http://schemas.microsoft.com/office/powerpoint/2010/main" val="346104047"/>
+        <p14:creationId xmlns:p14="http://schemas.microsoft.com/office/powerpoint/2010/main" val="2789262421"/>
       </p:ext>
     </p:extLst>
   </p:cSld>
@@ -814,6 +782,237 @@
           <a:bodyPr/>
           <a:lstStyle/>
           <a:p>
+            <a:pPr marL="0" marR="0" lvl="0" indent="0" algn="l" defTabSz="914400" rtl="0" eaLnBrk="1" fontAlgn="auto" latinLnBrk="0" hangingPunct="1">
+              <a:lnSpc>
+                <a:spcPct val="100000"/>
+              </a:lnSpc>
+              <a:spcBef>
+                <a:spcPts val="0"/>
+              </a:spcBef>
+              <a:spcAft>
+                <a:spcPts val="0"/>
+              </a:spcAft>
+              <a:buClrTx/>
+              <a:buSzTx/>
+              <a:buFontTx/>
+              <a:buNone/>
+              <a:tabLst/>
+              <a:defRPr/>
+            </a:pPr>
+            <a:r>
+              <a:rPr lang="en-US" dirty="0"/>
+              <a:t>https://www.ca4e.com/tools/cdc6504/</a:t>
+            </a:r>
+            <a:r>
+              <a:rPr lang="en-US" dirty="0" err="1"/>
+              <a:t>cpu-emulator.js</a:t>
+            </a:r>
+            <a:endParaRPr lang="en-US" dirty="0"/>
+          </a:p>
+          <a:p>
+            <a:endParaRPr lang="en-US" dirty="0"/>
+          </a:p>
+        </p:txBody>
+      </p:sp>
+      <p:sp>
+        <p:nvSpPr>
+          <p:cNvPr id="4" name="Slide Number Placeholder 3"/>
+          <p:cNvSpPr>
+            <a:spLocks noGrp="1"/>
+          </p:cNvSpPr>
+          <p:nvPr>
+            <p:ph type="sldNum" sz="quarter" idx="5"/>
+          </p:nvPr>
+        </p:nvSpPr>
+        <p:spPr/>
+        <p:txBody>
+          <a:bodyPr/>
+          <a:lstStyle/>
+          <a:p>
+            <a:fld id="{E556CA6E-FF8B-CA4B-9680-EA2F986E67B7}" type="slidenum">
+              <a:rPr lang="en-US" smtClean="0"/>
+              <a:t>5</a:t>
+            </a:fld>
+            <a:endParaRPr lang="en-US"/>
+          </a:p>
+        </p:txBody>
+      </p:sp>
+    </p:spTree>
+    <p:extLst>
+      <p:ext uri="{BB962C8B-B14F-4D97-AF65-F5344CB8AC3E}">
+        <p14:creationId xmlns:p14="http://schemas.microsoft.com/office/powerpoint/2010/main" val="4106002182"/>
+      </p:ext>
+    </p:extLst>
+  </p:cSld>
+  <p:clrMapOvr>
+    <a:masterClrMapping/>
+  </p:clrMapOvr>
+</p:notes>
+</file>
+
+<file path=ppt/notesSlides/notesSlide5.xml><?xml version="1.0" encoding="utf-8"?>
+<p:notes xmlns:a="http://schemas.openxmlformats.org/drawingml/2006/main" xmlns:r="http://schemas.openxmlformats.org/officeDocument/2006/relationships" xmlns:p="http://schemas.openxmlformats.org/presentationml/2006/main">
+  <p:cSld>
+    <p:spTree>
+      <p:nvGrpSpPr>
+        <p:cNvPr id="1" name=""/>
+        <p:cNvGrpSpPr/>
+        <p:nvPr/>
+      </p:nvGrpSpPr>
+      <p:grpSpPr>
+        <a:xfrm>
+          <a:off x="0" y="0"/>
+          <a:ext cx="0" cy="0"/>
+          <a:chOff x="0" y="0"/>
+          <a:chExt cx="0" cy="0"/>
+        </a:xfrm>
+      </p:grpSpPr>
+      <p:sp>
+        <p:nvSpPr>
+          <p:cNvPr id="2" name="Slide Image Placeholder 1"/>
+          <p:cNvSpPr>
+            <a:spLocks noGrp="1" noRot="1" noChangeAspect="1"/>
+          </p:cNvSpPr>
+          <p:nvPr>
+            <p:ph type="sldImg"/>
+          </p:nvPr>
+        </p:nvSpPr>
+        <p:spPr/>
+      </p:sp>
+      <p:sp>
+        <p:nvSpPr>
+          <p:cNvPr id="3" name="Notes Placeholder 2"/>
+          <p:cNvSpPr>
+            <a:spLocks noGrp="1"/>
+          </p:cNvSpPr>
+          <p:nvPr>
+            <p:ph type="body" idx="1"/>
+          </p:nvPr>
+        </p:nvSpPr>
+        <p:spPr/>
+        <p:txBody>
+          <a:bodyPr/>
+          <a:lstStyle/>
+          <a:p>
+            <a:r>
+              <a:rPr lang="en-US" dirty="0"/>
+              <a:t>https://</a:t>
+            </a:r>
+            <a:r>
+              <a:rPr lang="en-US" dirty="0" err="1"/>
+              <a:t>archive.org</a:t>
+            </a:r>
+            <a:r>
+              <a:rPr lang="en-US" dirty="0"/>
+              <a:t>/details/atari_2600_space_invaders_1980_atari_richard_maurer_-_sears_cx2632_-_49-75153</a:t>
+            </a:r>
+          </a:p>
+          <a:p>
+            <a:r>
+              <a:rPr lang="en-US" dirty="0"/>
+              <a:t>Press 2 to start game</a:t>
+            </a:r>
+          </a:p>
+          <a:p>
+            <a:r>
+              <a:rPr lang="en-US" dirty="0"/>
+              <a:t>Arrows Left right</a:t>
+            </a:r>
+          </a:p>
+          <a:p>
+            <a:r>
+              <a:rPr lang="en-US" dirty="0"/>
+              <a:t>Left Control fire</a:t>
+            </a:r>
+          </a:p>
+          <a:p>
+            <a:endParaRPr lang="en-US" dirty="0"/>
+          </a:p>
+          <a:p>
+            <a:endParaRPr lang="en-US" dirty="0"/>
+          </a:p>
+        </p:txBody>
+      </p:sp>
+      <p:sp>
+        <p:nvSpPr>
+          <p:cNvPr id="4" name="Slide Number Placeholder 3"/>
+          <p:cNvSpPr>
+            <a:spLocks noGrp="1"/>
+          </p:cNvSpPr>
+          <p:nvPr>
+            <p:ph type="sldNum" sz="quarter" idx="5"/>
+          </p:nvPr>
+        </p:nvSpPr>
+        <p:spPr/>
+        <p:txBody>
+          <a:bodyPr/>
+          <a:lstStyle/>
+          <a:p>
+            <a:fld id="{E556CA6E-FF8B-CA4B-9680-EA2F986E67B7}" type="slidenum">
+              <a:rPr lang="en-US" smtClean="0"/>
+              <a:t>8</a:t>
+            </a:fld>
+            <a:endParaRPr lang="en-US"/>
+          </a:p>
+        </p:txBody>
+      </p:sp>
+    </p:spTree>
+    <p:extLst>
+      <p:ext uri="{BB962C8B-B14F-4D97-AF65-F5344CB8AC3E}">
+        <p14:creationId xmlns:p14="http://schemas.microsoft.com/office/powerpoint/2010/main" val="346104047"/>
+      </p:ext>
+    </p:extLst>
+  </p:cSld>
+  <p:clrMapOvr>
+    <a:masterClrMapping/>
+  </p:clrMapOvr>
+</p:notes>
+</file>
+
+<file path=ppt/notesSlides/notesSlide6.xml><?xml version="1.0" encoding="utf-8"?>
+<p:notes xmlns:a="http://schemas.openxmlformats.org/drawingml/2006/main" xmlns:r="http://schemas.openxmlformats.org/officeDocument/2006/relationships" xmlns:p="http://schemas.openxmlformats.org/presentationml/2006/main">
+  <p:cSld>
+    <p:spTree>
+      <p:nvGrpSpPr>
+        <p:cNvPr id="1" name=""/>
+        <p:cNvGrpSpPr/>
+        <p:nvPr/>
+      </p:nvGrpSpPr>
+      <p:grpSpPr>
+        <a:xfrm>
+          <a:off x="0" y="0"/>
+          <a:ext cx="0" cy="0"/>
+          <a:chOff x="0" y="0"/>
+          <a:chExt cx="0" cy="0"/>
+        </a:xfrm>
+      </p:grpSpPr>
+      <p:sp>
+        <p:nvSpPr>
+          <p:cNvPr id="2" name="Slide Image Placeholder 1"/>
+          <p:cNvSpPr>
+            <a:spLocks noGrp="1" noRot="1" noChangeAspect="1"/>
+          </p:cNvSpPr>
+          <p:nvPr>
+            <p:ph type="sldImg"/>
+          </p:nvPr>
+        </p:nvSpPr>
+        <p:spPr/>
+      </p:sp>
+      <p:sp>
+        <p:nvSpPr>
+          <p:cNvPr id="3" name="Notes Placeholder 2"/>
+          <p:cNvSpPr>
+            <a:spLocks noGrp="1"/>
+          </p:cNvSpPr>
+          <p:nvPr>
+            <p:ph type="body" idx="1"/>
+          </p:nvPr>
+        </p:nvSpPr>
+        <p:spPr/>
+        <p:txBody>
+          <a:bodyPr/>
+          <a:lstStyle/>
+          <a:p>
             <a:r>
               <a:rPr lang="en-US" dirty="0"/>
               <a:t>The Intel Macs were </a:t>
@@ -858,6 +1057,185 @@
     <p:extLst>
       <p:ext uri="{BB962C8B-B14F-4D97-AF65-F5344CB8AC3E}">
         <p14:creationId xmlns:p14="http://schemas.microsoft.com/office/powerpoint/2010/main" val="2770494966"/>
+      </p:ext>
+    </p:extLst>
+  </p:cSld>
+  <p:clrMapOvr>
+    <a:masterClrMapping/>
+  </p:clrMapOvr>
+</p:notes>
+</file>
+
+<file path=ppt/notesSlides/notesSlide7.xml><?xml version="1.0" encoding="utf-8"?>
+<p:notes xmlns:a="http://schemas.openxmlformats.org/drawingml/2006/main" xmlns:r="http://schemas.openxmlformats.org/officeDocument/2006/relationships" xmlns:p="http://schemas.openxmlformats.org/presentationml/2006/main">
+  <p:cSld>
+    <p:spTree>
+      <p:nvGrpSpPr>
+        <p:cNvPr id="1" name=""/>
+        <p:cNvGrpSpPr/>
+        <p:nvPr/>
+      </p:nvGrpSpPr>
+      <p:grpSpPr>
+        <a:xfrm>
+          <a:off x="0" y="0"/>
+          <a:ext cx="0" cy="0"/>
+          <a:chOff x="0" y="0"/>
+          <a:chExt cx="0" cy="0"/>
+        </a:xfrm>
+      </p:grpSpPr>
+      <p:sp>
+        <p:nvSpPr>
+          <p:cNvPr id="2" name="Slide Image Placeholder 1"/>
+          <p:cNvSpPr>
+            <a:spLocks noGrp="1" noRot="1" noChangeAspect="1"/>
+          </p:cNvSpPr>
+          <p:nvPr>
+            <p:ph type="sldImg"/>
+          </p:nvPr>
+        </p:nvSpPr>
+        <p:spPr/>
+      </p:sp>
+      <p:sp>
+        <p:nvSpPr>
+          <p:cNvPr id="3" name="Notes Placeholder 2"/>
+          <p:cNvSpPr>
+            <a:spLocks noGrp="1"/>
+          </p:cNvSpPr>
+          <p:nvPr>
+            <p:ph type="body" idx="1"/>
+          </p:nvPr>
+        </p:nvSpPr>
+        <p:spPr/>
+        <p:txBody>
+          <a:bodyPr/>
+          <a:lstStyle/>
+          <a:p>
+            <a:pPr marL="0" marR="0" lvl="0" indent="0" algn="l" defTabSz="914400" rtl="0" eaLnBrk="1" fontAlgn="auto" latinLnBrk="0" hangingPunct="1">
+              <a:lnSpc>
+                <a:spcPct val="100000"/>
+              </a:lnSpc>
+              <a:spcBef>
+                <a:spcPts val="0"/>
+              </a:spcBef>
+              <a:spcAft>
+                <a:spcPts val="0"/>
+              </a:spcAft>
+              <a:buClrTx/>
+              <a:buSzTx/>
+              <a:buFontTx/>
+              <a:buNone/>
+              <a:tabLst/>
+              <a:defRPr/>
+            </a:pPr>
+            <a:r>
+              <a:rPr lang="en-US" dirty="0"/>
+              <a:t>Sophie Wilson pointing at a large poster of the circuit </a:t>
+            </a:r>
+            <a:r>
+              <a:rPr lang="en-US" dirty="0" err="1"/>
+              <a:t>lauout</a:t>
+            </a:r>
+            <a:r>
+              <a:rPr lang="en-US" dirty="0"/>
+              <a:t> of an ARM processor.</a:t>
+            </a:r>
+          </a:p>
+          <a:p>
+            <a:pPr marL="0" marR="0" lvl="0" indent="0" algn="l" defTabSz="914400" rtl="0" eaLnBrk="1" fontAlgn="auto" latinLnBrk="0" hangingPunct="1">
+              <a:lnSpc>
+                <a:spcPct val="100000"/>
+              </a:lnSpc>
+              <a:spcBef>
+                <a:spcPts val="0"/>
+              </a:spcBef>
+              <a:spcAft>
+                <a:spcPts val="0"/>
+              </a:spcAft>
+              <a:buClrTx/>
+              <a:buSzTx/>
+              <a:buFontTx/>
+              <a:buNone/>
+              <a:tabLst/>
+              <a:defRPr/>
+            </a:pPr>
+            <a:endParaRPr lang="en-US" dirty="0"/>
+          </a:p>
+          <a:p>
+            <a:pPr marL="0" marR="0" lvl="0" indent="0" algn="l" defTabSz="914400" rtl="0" eaLnBrk="1" fontAlgn="auto" latinLnBrk="0" hangingPunct="1">
+              <a:lnSpc>
+                <a:spcPct val="100000"/>
+              </a:lnSpc>
+              <a:spcBef>
+                <a:spcPts val="0"/>
+              </a:spcBef>
+              <a:spcAft>
+                <a:spcPts val="0"/>
+              </a:spcAft>
+              <a:buClrTx/>
+              <a:buSzTx/>
+              <a:buFontTx/>
+              <a:buNone/>
+              <a:tabLst/>
+              <a:defRPr/>
+            </a:pPr>
+            <a:r>
+              <a:rPr lang="en-US" dirty="0"/>
+              <a:t>Reference:</a:t>
+            </a:r>
+            <a:r>
+              <a:rPr lang="en-US" baseline="0" dirty="0"/>
+              <a:t> </a:t>
+            </a:r>
+            <a:r>
+              <a:rPr lang="en-US" dirty="0"/>
+              <a:t>https://</a:t>
+            </a:r>
+            <a:r>
+              <a:rPr lang="en-US" dirty="0" err="1"/>
+              <a:t>en.wikipedia.org</a:t>
+            </a:r>
+            <a:r>
+              <a:rPr lang="en-US" dirty="0"/>
+              <a:t>/wiki/</a:t>
+            </a:r>
+            <a:r>
+              <a:rPr lang="en-US" dirty="0" err="1"/>
+              <a:t>Sophie_Wilson</a:t>
+            </a:r>
+            <a:endParaRPr lang="en-US" dirty="0"/>
+          </a:p>
+          <a:p>
+            <a:endParaRPr lang="en-US" dirty="0"/>
+          </a:p>
+        </p:txBody>
+      </p:sp>
+      <p:sp>
+        <p:nvSpPr>
+          <p:cNvPr id="4" name="Slide Number Placeholder 3"/>
+          <p:cNvSpPr>
+            <a:spLocks noGrp="1"/>
+          </p:cNvSpPr>
+          <p:nvPr>
+            <p:ph type="sldNum" sz="quarter" idx="5"/>
+          </p:nvPr>
+        </p:nvSpPr>
+        <p:spPr/>
+        <p:txBody>
+          <a:bodyPr/>
+          <a:lstStyle/>
+          <a:p>
+            <a:fld id="{E556CA6E-FF8B-CA4B-9680-EA2F986E67B7}" type="slidenum">
+              <a:rPr lang="en-US" smtClean="0"/>
+              <a:t>18</a:t>
+            </a:fld>
+            <a:endParaRPr lang="en-US"/>
+          </a:p>
+        </p:txBody>
+      </p:sp>
+    </p:spTree>
+    <p:extLst>
+      <p:ext uri="{BB962C8B-B14F-4D97-AF65-F5344CB8AC3E}">
+        <p14:creationId xmlns:p14="http://schemas.microsoft.com/office/powerpoint/2010/main" val="3455871434"/>
       </p:ext>
     </p:extLst>
   </p:cSld>
@@ -1014,7 +1392,7 @@
           <a:p>
             <a:fld id="{DAF77B6C-6B39-B84F-862C-036E8F44DCDC}" type="datetimeFigureOut">
               <a:rPr lang="en-US" smtClean="0"/>
-              <a:t>1/7/26</a:t>
+              <a:t>3/22/26</a:t>
             </a:fld>
             <a:endParaRPr lang="en-US"/>
           </a:p>
@@ -1212,7 +1590,7 @@
           <a:p>
             <a:fld id="{DAF77B6C-6B39-B84F-862C-036E8F44DCDC}" type="datetimeFigureOut">
               <a:rPr lang="en-US" smtClean="0"/>
-              <a:t>1/7/26</a:t>
+              <a:t>3/22/26</a:t>
             </a:fld>
             <a:endParaRPr lang="en-US"/>
           </a:p>
@@ -1420,7 +1798,7 @@
           <a:p>
             <a:fld id="{DAF77B6C-6B39-B84F-862C-036E8F44DCDC}" type="datetimeFigureOut">
               <a:rPr lang="en-US" smtClean="0"/>
-              <a:t>1/7/26</a:t>
+              <a:t>3/22/26</a:t>
             </a:fld>
             <a:endParaRPr lang="en-US"/>
           </a:p>
@@ -1618,7 +1996,7 @@
           <a:p>
             <a:fld id="{DAF77B6C-6B39-B84F-862C-036E8F44DCDC}" type="datetimeFigureOut">
               <a:rPr lang="en-US" smtClean="0"/>
-              <a:t>1/7/26</a:t>
+              <a:t>3/22/26</a:t>
             </a:fld>
             <a:endParaRPr lang="en-US"/>
           </a:p>
@@ -1893,7 +2271,7 @@
           <a:p>
             <a:fld id="{DAF77B6C-6B39-B84F-862C-036E8F44DCDC}" type="datetimeFigureOut">
               <a:rPr lang="en-US" smtClean="0"/>
-              <a:t>1/7/26</a:t>
+              <a:t>3/22/26</a:t>
             </a:fld>
             <a:endParaRPr lang="en-US"/>
           </a:p>
@@ -2158,7 +2536,7 @@
           <a:p>
             <a:fld id="{DAF77B6C-6B39-B84F-862C-036E8F44DCDC}" type="datetimeFigureOut">
               <a:rPr lang="en-US" smtClean="0"/>
-              <a:t>1/7/26</a:t>
+              <a:t>3/22/26</a:t>
             </a:fld>
             <a:endParaRPr lang="en-US"/>
           </a:p>
@@ -2570,7 +2948,7 @@
           <a:p>
             <a:fld id="{DAF77B6C-6B39-B84F-862C-036E8F44DCDC}" type="datetimeFigureOut">
               <a:rPr lang="en-US" smtClean="0"/>
-              <a:t>1/7/26</a:t>
+              <a:t>3/22/26</a:t>
             </a:fld>
             <a:endParaRPr lang="en-US"/>
           </a:p>
@@ -2711,7 +3089,7 @@
           <a:p>
             <a:fld id="{DAF77B6C-6B39-B84F-862C-036E8F44DCDC}" type="datetimeFigureOut">
               <a:rPr lang="en-US" smtClean="0"/>
-              <a:t>1/7/26</a:t>
+              <a:t>3/22/26</a:t>
             </a:fld>
             <a:endParaRPr lang="en-US"/>
           </a:p>
@@ -2824,7 +3202,7 @@
           <a:p>
             <a:fld id="{DAF77B6C-6B39-B84F-862C-036E8F44DCDC}" type="datetimeFigureOut">
               <a:rPr lang="en-US" smtClean="0"/>
-              <a:t>1/7/26</a:t>
+              <a:t>3/22/26</a:t>
             </a:fld>
             <a:endParaRPr lang="en-US"/>
           </a:p>
@@ -3135,7 +3513,7 @@
           <a:p>
             <a:fld id="{DAF77B6C-6B39-B84F-862C-036E8F44DCDC}" type="datetimeFigureOut">
               <a:rPr lang="en-US" smtClean="0"/>
-              <a:t>1/7/26</a:t>
+              <a:t>3/22/26</a:t>
             </a:fld>
             <a:endParaRPr lang="en-US"/>
           </a:p>
@@ -3423,7 +3801,7 @@
           <a:p>
             <a:fld id="{DAF77B6C-6B39-B84F-862C-036E8F44DCDC}" type="datetimeFigureOut">
               <a:rPr lang="en-US" smtClean="0"/>
-              <a:t>1/7/26</a:t>
+              <a:t>3/22/26</a:t>
             </a:fld>
             <a:endParaRPr lang="en-US"/>
           </a:p>
@@ -3664,7 +4042,7 @@
           <a:p>
             <a:fld id="{DAF77B6C-6B39-B84F-862C-036E8F44DCDC}" type="datetimeFigureOut">
               <a:rPr lang="en-US" smtClean="0"/>
-              <a:t>1/7/26</a:t>
+              <a:t>3/22/26</a:t>
             </a:fld>
             <a:endParaRPr lang="en-US"/>
           </a:p>
@@ -4444,6 +4822,39 @@
       </p:grpSpPr>
       <p:sp>
         <p:nvSpPr>
+          <p:cNvPr id="6" name="Title 5">
+            <a:extLst>
+              <a:ext uri="{FF2B5EF4-FFF2-40B4-BE49-F238E27FC236}">
+                <a16:creationId xmlns:a16="http://schemas.microsoft.com/office/drawing/2014/main" id="{0D37124D-6EA9-45AF-A343-E048DF092E26}"/>
+              </a:ext>
+            </a:extLst>
+          </p:cNvPr>
+          <p:cNvSpPr>
+            <a:spLocks noGrp="1"/>
+          </p:cNvSpPr>
+          <p:nvPr>
+            <p:ph type="title"/>
+          </p:nvPr>
+        </p:nvSpPr>
+        <p:spPr>
+          <a:xfrm>
+            <a:off x="637697" y="1141069"/>
+            <a:ext cx="2944586" cy="1325563"/>
+          </a:xfrm>
+        </p:spPr>
+        <p:txBody>
+          <a:bodyPr/>
+          <a:lstStyle/>
+          <a:p>
+            <a:r>
+              <a:rPr lang="en-US" dirty="0"/>
+              <a:t>WASM Hello World</a:t>
+            </a:r>
+          </a:p>
+        </p:txBody>
+      </p:sp>
+      <p:sp>
+        <p:nvSpPr>
           <p:cNvPr id="4" name="TextBox 3">
             <a:extLst>
               <a:ext uri="{FF2B5EF4-FFF2-40B4-BE49-F238E27FC236}">
@@ -4456,7 +4867,7 @@
         </p:nvSpPr>
         <p:spPr>
           <a:xfrm>
-            <a:off x="323606" y="384239"/>
+            <a:off x="4398694" y="289679"/>
             <a:ext cx="7629012" cy="3139321"/>
           </a:xfrm>
           <a:prstGeom prst="rect">
@@ -4728,39 +5139,6 @@
                 <a:cs typeface="Courier New" panose="02070309020205020404" pitchFamily="49" charset="0"/>
               </a:rPr>
               <a:t>!|</a:t>
-            </a:r>
-          </a:p>
-        </p:txBody>
-      </p:sp>
-      <p:sp>
-        <p:nvSpPr>
-          <p:cNvPr id="6" name="Title 5">
-            <a:extLst>
-              <a:ext uri="{FF2B5EF4-FFF2-40B4-BE49-F238E27FC236}">
-                <a16:creationId xmlns:a16="http://schemas.microsoft.com/office/drawing/2014/main" id="{0D37124D-6EA9-45AF-A343-E048DF092E26}"/>
-              </a:ext>
-            </a:extLst>
-          </p:cNvPr>
-          <p:cNvSpPr>
-            <a:spLocks noGrp="1"/>
-          </p:cNvSpPr>
-          <p:nvPr>
-            <p:ph type="title"/>
-          </p:nvPr>
-        </p:nvSpPr>
-        <p:spPr>
-          <a:xfrm>
-            <a:off x="8768443" y="985610"/>
-            <a:ext cx="2944586" cy="1325563"/>
-          </a:xfrm>
-        </p:spPr>
-        <p:txBody>
-          <a:bodyPr/>
-          <a:lstStyle/>
-          <a:p>
-            <a:r>
-              <a:rPr lang="en-US" dirty="0"/>
-              <a:t>WASM Hello World</a:t>
             </a:r>
           </a:p>
         </p:txBody>
@@ -4795,6 +5173,41 @@
           <a:chExt cx="0" cy="0"/>
         </a:xfrm>
       </p:grpSpPr>
+      <p:sp>
+        <p:nvSpPr>
+          <p:cNvPr id="2" name="Title 1">
+            <a:extLst>
+              <a:ext uri="{FF2B5EF4-FFF2-40B4-BE49-F238E27FC236}">
+                <a16:creationId xmlns:a16="http://schemas.microsoft.com/office/drawing/2014/main" id="{5B5E2B2A-D0C9-FDBE-B511-A50059B2209A}"/>
+              </a:ext>
+            </a:extLst>
+          </p:cNvPr>
+          <p:cNvSpPr>
+            <a:spLocks noGrp="1"/>
+          </p:cNvSpPr>
+          <p:nvPr>
+            <p:ph type="title" idx="4294967295"/>
+          </p:nvPr>
+        </p:nvSpPr>
+        <p:spPr>
+          <a:xfrm>
+            <a:off x="838200" y="-1325563"/>
+            <a:ext cx="10515600" cy="1325563"/>
+          </a:xfrm>
+        </p:spPr>
+        <p:txBody>
+          <a:bodyPr vert="horz" lIns="91440" tIns="45720" rIns="91440" bIns="45720" rtlCol="0" anchor="b">
+            <a:normAutofit/>
+          </a:bodyPr>
+          <a:lstStyle/>
+          <a:p>
+            <a:r>
+              <a:rPr lang="en-US" dirty="0"/>
+              <a:t>C Program for Everybody – C Coding Playground</a:t>
+            </a:r>
+          </a:p>
+        </p:txBody>
+      </p:sp>
       <p:pic>
         <p:nvPicPr>
           <p:cNvPr id="4" name="Picture 3" descr="A screen shot of https://www.cc4e.com/play.php showing an in-browser C development environment with the classic “Hello World” program being shown.">
@@ -5365,198 +5778,198 @@
           <a:custGeom>
             <a:avLst/>
             <a:gdLst>
-              <a:gd name="connsiteX0" fmla="*/ 0 w 10972800"/>
-              <a:gd name="connsiteY0" fmla="*/ 0 h 18288"/>
-              <a:gd name="connsiteX1" fmla="*/ 356616 w 10972800"/>
-              <a:gd name="connsiteY1" fmla="*/ 0 h 18288"/>
-              <a:gd name="connsiteX2" fmla="*/ 1042416 w 10972800"/>
-              <a:gd name="connsiteY2" fmla="*/ 0 h 18288"/>
-              <a:gd name="connsiteX3" fmla="*/ 1947672 w 10972800"/>
-              <a:gd name="connsiteY3" fmla="*/ 0 h 18288"/>
-              <a:gd name="connsiteX4" fmla="*/ 2633472 w 10972800"/>
-              <a:gd name="connsiteY4" fmla="*/ 0 h 18288"/>
-              <a:gd name="connsiteX5" fmla="*/ 2990088 w 10972800"/>
-              <a:gd name="connsiteY5" fmla="*/ 0 h 18288"/>
-              <a:gd name="connsiteX6" fmla="*/ 3456432 w 10972800"/>
-              <a:gd name="connsiteY6" fmla="*/ 0 h 18288"/>
-              <a:gd name="connsiteX7" fmla="*/ 4361688 w 10972800"/>
-              <a:gd name="connsiteY7" fmla="*/ 0 h 18288"/>
-              <a:gd name="connsiteX8" fmla="*/ 5266944 w 10972800"/>
-              <a:gd name="connsiteY8" fmla="*/ 0 h 18288"/>
-              <a:gd name="connsiteX9" fmla="*/ 6172200 w 10972800"/>
-              <a:gd name="connsiteY9" fmla="*/ 0 h 18288"/>
-              <a:gd name="connsiteX10" fmla="*/ 6528816 w 10972800"/>
-              <a:gd name="connsiteY10" fmla="*/ 0 h 18288"/>
-              <a:gd name="connsiteX11" fmla="*/ 7214616 w 10972800"/>
-              <a:gd name="connsiteY11" fmla="*/ 0 h 18288"/>
-              <a:gd name="connsiteX12" fmla="*/ 7790688 w 10972800"/>
-              <a:gd name="connsiteY12" fmla="*/ 0 h 18288"/>
-              <a:gd name="connsiteX13" fmla="*/ 8147304 w 10972800"/>
-              <a:gd name="connsiteY13" fmla="*/ 0 h 18288"/>
-              <a:gd name="connsiteX14" fmla="*/ 9052560 w 10972800"/>
-              <a:gd name="connsiteY14" fmla="*/ 0 h 18288"/>
-              <a:gd name="connsiteX15" fmla="*/ 9409176 w 10972800"/>
-              <a:gd name="connsiteY15" fmla="*/ 0 h 18288"/>
-              <a:gd name="connsiteX16" fmla="*/ 9765792 w 10972800"/>
-              <a:gd name="connsiteY16" fmla="*/ 0 h 18288"/>
-              <a:gd name="connsiteX17" fmla="*/ 10341864 w 10972800"/>
-              <a:gd name="connsiteY17" fmla="*/ 0 h 18288"/>
-              <a:gd name="connsiteX18" fmla="*/ 10972800 w 10972800"/>
-              <a:gd name="connsiteY18" fmla="*/ 0 h 18288"/>
-              <a:gd name="connsiteX19" fmla="*/ 10972800 w 10972800"/>
-              <a:gd name="connsiteY19" fmla="*/ 18288 h 18288"/>
-              <a:gd name="connsiteX20" fmla="*/ 10177272 w 10972800"/>
-              <a:gd name="connsiteY20" fmla="*/ 18288 h 18288"/>
-              <a:gd name="connsiteX21" fmla="*/ 9820656 w 10972800"/>
-              <a:gd name="connsiteY21" fmla="*/ 18288 h 18288"/>
-              <a:gd name="connsiteX22" fmla="*/ 9464040 w 10972800"/>
-              <a:gd name="connsiteY22" fmla="*/ 18288 h 18288"/>
-              <a:gd name="connsiteX23" fmla="*/ 8778240 w 10972800"/>
-              <a:gd name="connsiteY23" fmla="*/ 18288 h 18288"/>
-              <a:gd name="connsiteX24" fmla="*/ 8421624 w 10972800"/>
-              <a:gd name="connsiteY24" fmla="*/ 18288 h 18288"/>
-              <a:gd name="connsiteX25" fmla="*/ 7735824 w 10972800"/>
-              <a:gd name="connsiteY25" fmla="*/ 18288 h 18288"/>
-              <a:gd name="connsiteX26" fmla="*/ 6940296 w 10972800"/>
-              <a:gd name="connsiteY26" fmla="*/ 18288 h 18288"/>
-              <a:gd name="connsiteX27" fmla="*/ 6254496 w 10972800"/>
-              <a:gd name="connsiteY27" fmla="*/ 18288 h 18288"/>
-              <a:gd name="connsiteX28" fmla="*/ 5458968 w 10972800"/>
-              <a:gd name="connsiteY28" fmla="*/ 18288 h 18288"/>
-              <a:gd name="connsiteX29" fmla="*/ 4663440 w 10972800"/>
-              <a:gd name="connsiteY29" fmla="*/ 18288 h 18288"/>
-              <a:gd name="connsiteX30" fmla="*/ 4306824 w 10972800"/>
-              <a:gd name="connsiteY30" fmla="*/ 18288 h 18288"/>
-              <a:gd name="connsiteX31" fmla="*/ 3840480 w 10972800"/>
-              <a:gd name="connsiteY31" fmla="*/ 18288 h 18288"/>
-              <a:gd name="connsiteX32" fmla="*/ 3264408 w 10972800"/>
-              <a:gd name="connsiteY32" fmla="*/ 18288 h 18288"/>
-              <a:gd name="connsiteX33" fmla="*/ 2578608 w 10972800"/>
-              <a:gd name="connsiteY33" fmla="*/ 18288 h 18288"/>
-              <a:gd name="connsiteX34" fmla="*/ 1673352 w 10972800"/>
-              <a:gd name="connsiteY34" fmla="*/ 18288 h 18288"/>
-              <a:gd name="connsiteX35" fmla="*/ 877824 w 10972800"/>
-              <a:gd name="connsiteY35" fmla="*/ 18288 h 18288"/>
-              <a:gd name="connsiteX36" fmla="*/ 0 w 10972800"/>
-              <a:gd name="connsiteY36" fmla="*/ 18288 h 18288"/>
-              <a:gd name="connsiteX37" fmla="*/ 0 w 10972800"/>
-              <a:gd name="connsiteY37" fmla="*/ 0 h 18288"/>
+              <a:gd name="csX0" fmla="*/ 0 w 10972800"/>
+              <a:gd name="csY0" fmla="*/ 0 h 18288"/>
+              <a:gd name="csX1" fmla="*/ 356616 w 10972800"/>
+              <a:gd name="csY1" fmla="*/ 0 h 18288"/>
+              <a:gd name="csX2" fmla="*/ 1042416 w 10972800"/>
+              <a:gd name="csY2" fmla="*/ 0 h 18288"/>
+              <a:gd name="csX3" fmla="*/ 1947672 w 10972800"/>
+              <a:gd name="csY3" fmla="*/ 0 h 18288"/>
+              <a:gd name="csX4" fmla="*/ 2633472 w 10972800"/>
+              <a:gd name="csY4" fmla="*/ 0 h 18288"/>
+              <a:gd name="csX5" fmla="*/ 2990088 w 10972800"/>
+              <a:gd name="csY5" fmla="*/ 0 h 18288"/>
+              <a:gd name="csX6" fmla="*/ 3456432 w 10972800"/>
+              <a:gd name="csY6" fmla="*/ 0 h 18288"/>
+              <a:gd name="csX7" fmla="*/ 4361688 w 10972800"/>
+              <a:gd name="csY7" fmla="*/ 0 h 18288"/>
+              <a:gd name="csX8" fmla="*/ 5266944 w 10972800"/>
+              <a:gd name="csY8" fmla="*/ 0 h 18288"/>
+              <a:gd name="csX9" fmla="*/ 6172200 w 10972800"/>
+              <a:gd name="csY9" fmla="*/ 0 h 18288"/>
+              <a:gd name="csX10" fmla="*/ 6528816 w 10972800"/>
+              <a:gd name="csY10" fmla="*/ 0 h 18288"/>
+              <a:gd name="csX11" fmla="*/ 7214616 w 10972800"/>
+              <a:gd name="csY11" fmla="*/ 0 h 18288"/>
+              <a:gd name="csX12" fmla="*/ 7790688 w 10972800"/>
+              <a:gd name="csY12" fmla="*/ 0 h 18288"/>
+              <a:gd name="csX13" fmla="*/ 8147304 w 10972800"/>
+              <a:gd name="csY13" fmla="*/ 0 h 18288"/>
+              <a:gd name="csX14" fmla="*/ 9052560 w 10972800"/>
+              <a:gd name="csY14" fmla="*/ 0 h 18288"/>
+              <a:gd name="csX15" fmla="*/ 9409176 w 10972800"/>
+              <a:gd name="csY15" fmla="*/ 0 h 18288"/>
+              <a:gd name="csX16" fmla="*/ 9765792 w 10972800"/>
+              <a:gd name="csY16" fmla="*/ 0 h 18288"/>
+              <a:gd name="csX17" fmla="*/ 10341864 w 10972800"/>
+              <a:gd name="csY17" fmla="*/ 0 h 18288"/>
+              <a:gd name="csX18" fmla="*/ 10972800 w 10972800"/>
+              <a:gd name="csY18" fmla="*/ 0 h 18288"/>
+              <a:gd name="csX19" fmla="*/ 10972800 w 10972800"/>
+              <a:gd name="csY19" fmla="*/ 18288 h 18288"/>
+              <a:gd name="csX20" fmla="*/ 10177272 w 10972800"/>
+              <a:gd name="csY20" fmla="*/ 18288 h 18288"/>
+              <a:gd name="csX21" fmla="*/ 9820656 w 10972800"/>
+              <a:gd name="csY21" fmla="*/ 18288 h 18288"/>
+              <a:gd name="csX22" fmla="*/ 9464040 w 10972800"/>
+              <a:gd name="csY22" fmla="*/ 18288 h 18288"/>
+              <a:gd name="csX23" fmla="*/ 8778240 w 10972800"/>
+              <a:gd name="csY23" fmla="*/ 18288 h 18288"/>
+              <a:gd name="csX24" fmla="*/ 8421624 w 10972800"/>
+              <a:gd name="csY24" fmla="*/ 18288 h 18288"/>
+              <a:gd name="csX25" fmla="*/ 7735824 w 10972800"/>
+              <a:gd name="csY25" fmla="*/ 18288 h 18288"/>
+              <a:gd name="csX26" fmla="*/ 6940296 w 10972800"/>
+              <a:gd name="csY26" fmla="*/ 18288 h 18288"/>
+              <a:gd name="csX27" fmla="*/ 6254496 w 10972800"/>
+              <a:gd name="csY27" fmla="*/ 18288 h 18288"/>
+              <a:gd name="csX28" fmla="*/ 5458968 w 10972800"/>
+              <a:gd name="csY28" fmla="*/ 18288 h 18288"/>
+              <a:gd name="csX29" fmla="*/ 4663440 w 10972800"/>
+              <a:gd name="csY29" fmla="*/ 18288 h 18288"/>
+              <a:gd name="csX30" fmla="*/ 4306824 w 10972800"/>
+              <a:gd name="csY30" fmla="*/ 18288 h 18288"/>
+              <a:gd name="csX31" fmla="*/ 3840480 w 10972800"/>
+              <a:gd name="csY31" fmla="*/ 18288 h 18288"/>
+              <a:gd name="csX32" fmla="*/ 3264408 w 10972800"/>
+              <a:gd name="csY32" fmla="*/ 18288 h 18288"/>
+              <a:gd name="csX33" fmla="*/ 2578608 w 10972800"/>
+              <a:gd name="csY33" fmla="*/ 18288 h 18288"/>
+              <a:gd name="csX34" fmla="*/ 1673352 w 10972800"/>
+              <a:gd name="csY34" fmla="*/ 18288 h 18288"/>
+              <a:gd name="csX35" fmla="*/ 877824 w 10972800"/>
+              <a:gd name="csY35" fmla="*/ 18288 h 18288"/>
+              <a:gd name="csX36" fmla="*/ 0 w 10972800"/>
+              <a:gd name="csY36" fmla="*/ 18288 h 18288"/>
+              <a:gd name="csX37" fmla="*/ 0 w 10972800"/>
+              <a:gd name="csY37" fmla="*/ 0 h 18288"/>
             </a:gdLst>
             <a:ahLst/>
             <a:cxnLst>
               <a:cxn ang="0">
-                <a:pos x="connsiteX0" y="connsiteY0"/>
+                <a:pos x="csX0" y="csY0"/>
               </a:cxn>
               <a:cxn ang="0">
-                <a:pos x="connsiteX1" y="connsiteY1"/>
+                <a:pos x="csX1" y="csY1"/>
               </a:cxn>
               <a:cxn ang="0">
-                <a:pos x="connsiteX2" y="connsiteY2"/>
+                <a:pos x="csX2" y="csY2"/>
               </a:cxn>
               <a:cxn ang="0">
-                <a:pos x="connsiteX3" y="connsiteY3"/>
+                <a:pos x="csX3" y="csY3"/>
               </a:cxn>
               <a:cxn ang="0">
-                <a:pos x="connsiteX4" y="connsiteY4"/>
+                <a:pos x="csX4" y="csY4"/>
               </a:cxn>
               <a:cxn ang="0">
-                <a:pos x="connsiteX5" y="connsiteY5"/>
+                <a:pos x="csX5" y="csY5"/>
               </a:cxn>
               <a:cxn ang="0">
-                <a:pos x="connsiteX6" y="connsiteY6"/>
+                <a:pos x="csX6" y="csY6"/>
               </a:cxn>
               <a:cxn ang="0">
-                <a:pos x="connsiteX7" y="connsiteY7"/>
+                <a:pos x="csX7" y="csY7"/>
               </a:cxn>
               <a:cxn ang="0">
-                <a:pos x="connsiteX8" y="connsiteY8"/>
+                <a:pos x="csX8" y="csY8"/>
               </a:cxn>
               <a:cxn ang="0">
-                <a:pos x="connsiteX9" y="connsiteY9"/>
+                <a:pos x="csX9" y="csY9"/>
               </a:cxn>
               <a:cxn ang="0">
-                <a:pos x="connsiteX10" y="connsiteY10"/>
+                <a:pos x="csX10" y="csY10"/>
               </a:cxn>
               <a:cxn ang="0">
-                <a:pos x="connsiteX11" y="connsiteY11"/>
+                <a:pos x="csX11" y="csY11"/>
               </a:cxn>
               <a:cxn ang="0">
-                <a:pos x="connsiteX12" y="connsiteY12"/>
+                <a:pos x="csX12" y="csY12"/>
               </a:cxn>
               <a:cxn ang="0">
-                <a:pos x="connsiteX13" y="connsiteY13"/>
+                <a:pos x="csX13" y="csY13"/>
               </a:cxn>
               <a:cxn ang="0">
-                <a:pos x="connsiteX14" y="connsiteY14"/>
+                <a:pos x="csX14" y="csY14"/>
               </a:cxn>
               <a:cxn ang="0">
-                <a:pos x="connsiteX15" y="connsiteY15"/>
+                <a:pos x="csX15" y="csY15"/>
               </a:cxn>
               <a:cxn ang="0">
-                <a:pos x="connsiteX16" y="connsiteY16"/>
+                <a:pos x="csX16" y="csY16"/>
               </a:cxn>
               <a:cxn ang="0">
-                <a:pos x="connsiteX17" y="connsiteY17"/>
+                <a:pos x="csX17" y="csY17"/>
               </a:cxn>
               <a:cxn ang="0">
-                <a:pos x="connsiteX18" y="connsiteY18"/>
+                <a:pos x="csX18" y="csY18"/>
               </a:cxn>
               <a:cxn ang="0">
-                <a:pos x="connsiteX19" y="connsiteY19"/>
+                <a:pos x="csX19" y="csY19"/>
               </a:cxn>
               <a:cxn ang="0">
-                <a:pos x="connsiteX20" y="connsiteY20"/>
+                <a:pos x="csX20" y="csY20"/>
               </a:cxn>
               <a:cxn ang="0">
-                <a:pos x="connsiteX21" y="connsiteY21"/>
+                <a:pos x="csX21" y="csY21"/>
               </a:cxn>
               <a:cxn ang="0">
-                <a:pos x="connsiteX22" y="connsiteY22"/>
+                <a:pos x="csX22" y="csY22"/>
               </a:cxn>
               <a:cxn ang="0">
-                <a:pos x="connsiteX23" y="connsiteY23"/>
+                <a:pos x="csX23" y="csY23"/>
               </a:cxn>
               <a:cxn ang="0">
-                <a:pos x="connsiteX24" y="connsiteY24"/>
+                <a:pos x="csX24" y="csY24"/>
               </a:cxn>
               <a:cxn ang="0">
-                <a:pos x="connsiteX25" y="connsiteY25"/>
+                <a:pos x="csX25" y="csY25"/>
               </a:cxn>
               <a:cxn ang="0">
-                <a:pos x="connsiteX26" y="connsiteY26"/>
+                <a:pos x="csX26" y="csY26"/>
               </a:cxn>
               <a:cxn ang="0">
-                <a:pos x="connsiteX27" y="connsiteY27"/>
+                <a:pos x="csX27" y="csY27"/>
               </a:cxn>
               <a:cxn ang="0">
-                <a:pos x="connsiteX28" y="connsiteY28"/>
+                <a:pos x="csX28" y="csY28"/>
               </a:cxn>
               <a:cxn ang="0">
-                <a:pos x="connsiteX29" y="connsiteY29"/>
+                <a:pos x="csX29" y="csY29"/>
               </a:cxn>
               <a:cxn ang="0">
-                <a:pos x="connsiteX30" y="connsiteY30"/>
+                <a:pos x="csX30" y="csY30"/>
               </a:cxn>
               <a:cxn ang="0">
-                <a:pos x="connsiteX31" y="connsiteY31"/>
+                <a:pos x="csX31" y="csY31"/>
               </a:cxn>
               <a:cxn ang="0">
-                <a:pos x="connsiteX32" y="connsiteY32"/>
+                <a:pos x="csX32" y="csY32"/>
               </a:cxn>
               <a:cxn ang="0">
-                <a:pos x="connsiteX33" y="connsiteY33"/>
+                <a:pos x="csX33" y="csY33"/>
               </a:cxn>
               <a:cxn ang="0">
-                <a:pos x="connsiteX34" y="connsiteY34"/>
+                <a:pos x="csX34" y="csY34"/>
               </a:cxn>
               <a:cxn ang="0">
-                <a:pos x="connsiteX35" y="connsiteY35"/>
+                <a:pos x="csX35" y="csY35"/>
               </a:cxn>
               <a:cxn ang="0">
-                <a:pos x="connsiteX36" y="connsiteY36"/>
+                <a:pos x="csX36" y="csY36"/>
               </a:cxn>
               <a:cxn ang="0">
-                <a:pos x="connsiteX37" y="connsiteY37"/>
+                <a:pos x="csX37" y="csY37"/>
               </a:cxn>
             </a:cxnLst>
             <a:rect l="l" t="t" r="r" b="b"/>
@@ -6054,10 +6467,13 @@
       </p:sp>
       <p:pic>
         <p:nvPicPr>
-          <p:cNvPr id="5" name="Picture 4" descr="A black and white logo&#10;&#10;AI-generated content may be incorrect.">
+          <p:cNvPr id="5" name="Picture 4">
             <a:extLst>
               <a:ext uri="{FF2B5EF4-FFF2-40B4-BE49-F238E27FC236}">
                 <a16:creationId xmlns:a16="http://schemas.microsoft.com/office/drawing/2014/main" id="{09CEF786-9A1D-4425-C6CB-BC8EA821709E}"/>
+              </a:ext>
+              <a:ext uri="{C183D7F6-B498-43B3-948B-1728B52AA6E4}">
+                <adec:decorative xmlns:adec="http://schemas.microsoft.com/office/drawing/2017/decorative" val="1"/>
               </a:ext>
             </a:extLst>
           </p:cNvPr>
@@ -6199,7 +6615,7 @@
         </p:nvSpPr>
         <p:spPr>
           <a:xfrm>
-            <a:off x="572493" y="238539"/>
+            <a:off x="585216" y="247129"/>
             <a:ext cx="11018520" cy="1434415"/>
           </a:xfrm>
         </p:spPr>
@@ -6210,7 +6626,7 @@
           <a:lstStyle/>
           <a:p>
             <a:r>
-              <a:rPr lang="en-US" sz="5400"/>
+              <a:rPr lang="en-US" sz="5400" dirty="0"/>
               <a:t>Fun Aside – the 6502 influenced ARM</a:t>
             </a:r>
           </a:p>
@@ -6247,198 +6663,198 @@
           <a:custGeom>
             <a:avLst/>
             <a:gdLst>
-              <a:gd name="connsiteX0" fmla="*/ 0 w 10972800"/>
-              <a:gd name="connsiteY0" fmla="*/ 0 h 18288"/>
-              <a:gd name="connsiteX1" fmla="*/ 356616 w 10972800"/>
-              <a:gd name="connsiteY1" fmla="*/ 0 h 18288"/>
-              <a:gd name="connsiteX2" fmla="*/ 1042416 w 10972800"/>
-              <a:gd name="connsiteY2" fmla="*/ 0 h 18288"/>
-              <a:gd name="connsiteX3" fmla="*/ 1947672 w 10972800"/>
-              <a:gd name="connsiteY3" fmla="*/ 0 h 18288"/>
-              <a:gd name="connsiteX4" fmla="*/ 2633472 w 10972800"/>
-              <a:gd name="connsiteY4" fmla="*/ 0 h 18288"/>
-              <a:gd name="connsiteX5" fmla="*/ 2990088 w 10972800"/>
-              <a:gd name="connsiteY5" fmla="*/ 0 h 18288"/>
-              <a:gd name="connsiteX6" fmla="*/ 3456432 w 10972800"/>
-              <a:gd name="connsiteY6" fmla="*/ 0 h 18288"/>
-              <a:gd name="connsiteX7" fmla="*/ 4361688 w 10972800"/>
-              <a:gd name="connsiteY7" fmla="*/ 0 h 18288"/>
-              <a:gd name="connsiteX8" fmla="*/ 5266944 w 10972800"/>
-              <a:gd name="connsiteY8" fmla="*/ 0 h 18288"/>
-              <a:gd name="connsiteX9" fmla="*/ 6172200 w 10972800"/>
-              <a:gd name="connsiteY9" fmla="*/ 0 h 18288"/>
-              <a:gd name="connsiteX10" fmla="*/ 6528816 w 10972800"/>
-              <a:gd name="connsiteY10" fmla="*/ 0 h 18288"/>
-              <a:gd name="connsiteX11" fmla="*/ 7214616 w 10972800"/>
-              <a:gd name="connsiteY11" fmla="*/ 0 h 18288"/>
-              <a:gd name="connsiteX12" fmla="*/ 7790688 w 10972800"/>
-              <a:gd name="connsiteY12" fmla="*/ 0 h 18288"/>
-              <a:gd name="connsiteX13" fmla="*/ 8147304 w 10972800"/>
-              <a:gd name="connsiteY13" fmla="*/ 0 h 18288"/>
-              <a:gd name="connsiteX14" fmla="*/ 9052560 w 10972800"/>
-              <a:gd name="connsiteY14" fmla="*/ 0 h 18288"/>
-              <a:gd name="connsiteX15" fmla="*/ 9409176 w 10972800"/>
-              <a:gd name="connsiteY15" fmla="*/ 0 h 18288"/>
-              <a:gd name="connsiteX16" fmla="*/ 9765792 w 10972800"/>
-              <a:gd name="connsiteY16" fmla="*/ 0 h 18288"/>
-              <a:gd name="connsiteX17" fmla="*/ 10341864 w 10972800"/>
-              <a:gd name="connsiteY17" fmla="*/ 0 h 18288"/>
-              <a:gd name="connsiteX18" fmla="*/ 10972800 w 10972800"/>
-              <a:gd name="connsiteY18" fmla="*/ 0 h 18288"/>
-              <a:gd name="connsiteX19" fmla="*/ 10972800 w 10972800"/>
-              <a:gd name="connsiteY19" fmla="*/ 18288 h 18288"/>
-              <a:gd name="connsiteX20" fmla="*/ 10177272 w 10972800"/>
-              <a:gd name="connsiteY20" fmla="*/ 18288 h 18288"/>
-              <a:gd name="connsiteX21" fmla="*/ 9820656 w 10972800"/>
-              <a:gd name="connsiteY21" fmla="*/ 18288 h 18288"/>
-              <a:gd name="connsiteX22" fmla="*/ 9464040 w 10972800"/>
-              <a:gd name="connsiteY22" fmla="*/ 18288 h 18288"/>
-              <a:gd name="connsiteX23" fmla="*/ 8778240 w 10972800"/>
-              <a:gd name="connsiteY23" fmla="*/ 18288 h 18288"/>
-              <a:gd name="connsiteX24" fmla="*/ 8421624 w 10972800"/>
-              <a:gd name="connsiteY24" fmla="*/ 18288 h 18288"/>
-              <a:gd name="connsiteX25" fmla="*/ 7735824 w 10972800"/>
-              <a:gd name="connsiteY25" fmla="*/ 18288 h 18288"/>
-              <a:gd name="connsiteX26" fmla="*/ 6940296 w 10972800"/>
-              <a:gd name="connsiteY26" fmla="*/ 18288 h 18288"/>
-              <a:gd name="connsiteX27" fmla="*/ 6254496 w 10972800"/>
-              <a:gd name="connsiteY27" fmla="*/ 18288 h 18288"/>
-              <a:gd name="connsiteX28" fmla="*/ 5458968 w 10972800"/>
-              <a:gd name="connsiteY28" fmla="*/ 18288 h 18288"/>
-              <a:gd name="connsiteX29" fmla="*/ 4663440 w 10972800"/>
-              <a:gd name="connsiteY29" fmla="*/ 18288 h 18288"/>
-              <a:gd name="connsiteX30" fmla="*/ 4306824 w 10972800"/>
-              <a:gd name="connsiteY30" fmla="*/ 18288 h 18288"/>
-              <a:gd name="connsiteX31" fmla="*/ 3840480 w 10972800"/>
-              <a:gd name="connsiteY31" fmla="*/ 18288 h 18288"/>
-              <a:gd name="connsiteX32" fmla="*/ 3264408 w 10972800"/>
-              <a:gd name="connsiteY32" fmla="*/ 18288 h 18288"/>
-              <a:gd name="connsiteX33" fmla="*/ 2578608 w 10972800"/>
-              <a:gd name="connsiteY33" fmla="*/ 18288 h 18288"/>
-              <a:gd name="connsiteX34" fmla="*/ 1673352 w 10972800"/>
-              <a:gd name="connsiteY34" fmla="*/ 18288 h 18288"/>
-              <a:gd name="connsiteX35" fmla="*/ 877824 w 10972800"/>
-              <a:gd name="connsiteY35" fmla="*/ 18288 h 18288"/>
-              <a:gd name="connsiteX36" fmla="*/ 0 w 10972800"/>
-              <a:gd name="connsiteY36" fmla="*/ 18288 h 18288"/>
-              <a:gd name="connsiteX37" fmla="*/ 0 w 10972800"/>
-              <a:gd name="connsiteY37" fmla="*/ 0 h 18288"/>
+              <a:gd name="csX0" fmla="*/ 0 w 10972800"/>
+              <a:gd name="csY0" fmla="*/ 0 h 18288"/>
+              <a:gd name="csX1" fmla="*/ 356616 w 10972800"/>
+              <a:gd name="csY1" fmla="*/ 0 h 18288"/>
+              <a:gd name="csX2" fmla="*/ 1042416 w 10972800"/>
+              <a:gd name="csY2" fmla="*/ 0 h 18288"/>
+              <a:gd name="csX3" fmla="*/ 1947672 w 10972800"/>
+              <a:gd name="csY3" fmla="*/ 0 h 18288"/>
+              <a:gd name="csX4" fmla="*/ 2633472 w 10972800"/>
+              <a:gd name="csY4" fmla="*/ 0 h 18288"/>
+              <a:gd name="csX5" fmla="*/ 2990088 w 10972800"/>
+              <a:gd name="csY5" fmla="*/ 0 h 18288"/>
+              <a:gd name="csX6" fmla="*/ 3456432 w 10972800"/>
+              <a:gd name="csY6" fmla="*/ 0 h 18288"/>
+              <a:gd name="csX7" fmla="*/ 4361688 w 10972800"/>
+              <a:gd name="csY7" fmla="*/ 0 h 18288"/>
+              <a:gd name="csX8" fmla="*/ 5266944 w 10972800"/>
+              <a:gd name="csY8" fmla="*/ 0 h 18288"/>
+              <a:gd name="csX9" fmla="*/ 6172200 w 10972800"/>
+              <a:gd name="csY9" fmla="*/ 0 h 18288"/>
+              <a:gd name="csX10" fmla="*/ 6528816 w 10972800"/>
+              <a:gd name="csY10" fmla="*/ 0 h 18288"/>
+              <a:gd name="csX11" fmla="*/ 7214616 w 10972800"/>
+              <a:gd name="csY11" fmla="*/ 0 h 18288"/>
+              <a:gd name="csX12" fmla="*/ 7790688 w 10972800"/>
+              <a:gd name="csY12" fmla="*/ 0 h 18288"/>
+              <a:gd name="csX13" fmla="*/ 8147304 w 10972800"/>
+              <a:gd name="csY13" fmla="*/ 0 h 18288"/>
+              <a:gd name="csX14" fmla="*/ 9052560 w 10972800"/>
+              <a:gd name="csY14" fmla="*/ 0 h 18288"/>
+              <a:gd name="csX15" fmla="*/ 9409176 w 10972800"/>
+              <a:gd name="csY15" fmla="*/ 0 h 18288"/>
+              <a:gd name="csX16" fmla="*/ 9765792 w 10972800"/>
+              <a:gd name="csY16" fmla="*/ 0 h 18288"/>
+              <a:gd name="csX17" fmla="*/ 10341864 w 10972800"/>
+              <a:gd name="csY17" fmla="*/ 0 h 18288"/>
+              <a:gd name="csX18" fmla="*/ 10972800 w 10972800"/>
+              <a:gd name="csY18" fmla="*/ 0 h 18288"/>
+              <a:gd name="csX19" fmla="*/ 10972800 w 10972800"/>
+              <a:gd name="csY19" fmla="*/ 18288 h 18288"/>
+              <a:gd name="csX20" fmla="*/ 10177272 w 10972800"/>
+              <a:gd name="csY20" fmla="*/ 18288 h 18288"/>
+              <a:gd name="csX21" fmla="*/ 9820656 w 10972800"/>
+              <a:gd name="csY21" fmla="*/ 18288 h 18288"/>
+              <a:gd name="csX22" fmla="*/ 9464040 w 10972800"/>
+              <a:gd name="csY22" fmla="*/ 18288 h 18288"/>
+              <a:gd name="csX23" fmla="*/ 8778240 w 10972800"/>
+              <a:gd name="csY23" fmla="*/ 18288 h 18288"/>
+              <a:gd name="csX24" fmla="*/ 8421624 w 10972800"/>
+              <a:gd name="csY24" fmla="*/ 18288 h 18288"/>
+              <a:gd name="csX25" fmla="*/ 7735824 w 10972800"/>
+              <a:gd name="csY25" fmla="*/ 18288 h 18288"/>
+              <a:gd name="csX26" fmla="*/ 6940296 w 10972800"/>
+              <a:gd name="csY26" fmla="*/ 18288 h 18288"/>
+              <a:gd name="csX27" fmla="*/ 6254496 w 10972800"/>
+              <a:gd name="csY27" fmla="*/ 18288 h 18288"/>
+              <a:gd name="csX28" fmla="*/ 5458968 w 10972800"/>
+              <a:gd name="csY28" fmla="*/ 18288 h 18288"/>
+              <a:gd name="csX29" fmla="*/ 4663440 w 10972800"/>
+              <a:gd name="csY29" fmla="*/ 18288 h 18288"/>
+              <a:gd name="csX30" fmla="*/ 4306824 w 10972800"/>
+              <a:gd name="csY30" fmla="*/ 18288 h 18288"/>
+              <a:gd name="csX31" fmla="*/ 3840480 w 10972800"/>
+              <a:gd name="csY31" fmla="*/ 18288 h 18288"/>
+              <a:gd name="csX32" fmla="*/ 3264408 w 10972800"/>
+              <a:gd name="csY32" fmla="*/ 18288 h 18288"/>
+              <a:gd name="csX33" fmla="*/ 2578608 w 10972800"/>
+              <a:gd name="csY33" fmla="*/ 18288 h 18288"/>
+              <a:gd name="csX34" fmla="*/ 1673352 w 10972800"/>
+              <a:gd name="csY34" fmla="*/ 18288 h 18288"/>
+              <a:gd name="csX35" fmla="*/ 877824 w 10972800"/>
+              <a:gd name="csY35" fmla="*/ 18288 h 18288"/>
+              <a:gd name="csX36" fmla="*/ 0 w 10972800"/>
+              <a:gd name="csY36" fmla="*/ 18288 h 18288"/>
+              <a:gd name="csX37" fmla="*/ 0 w 10972800"/>
+              <a:gd name="csY37" fmla="*/ 0 h 18288"/>
             </a:gdLst>
             <a:ahLst/>
             <a:cxnLst>
               <a:cxn ang="0">
-                <a:pos x="connsiteX0" y="connsiteY0"/>
+                <a:pos x="csX0" y="csY0"/>
               </a:cxn>
               <a:cxn ang="0">
-                <a:pos x="connsiteX1" y="connsiteY1"/>
+                <a:pos x="csX1" y="csY1"/>
               </a:cxn>
               <a:cxn ang="0">
-                <a:pos x="connsiteX2" y="connsiteY2"/>
+                <a:pos x="csX2" y="csY2"/>
               </a:cxn>
               <a:cxn ang="0">
-                <a:pos x="connsiteX3" y="connsiteY3"/>
+                <a:pos x="csX3" y="csY3"/>
               </a:cxn>
               <a:cxn ang="0">
-                <a:pos x="connsiteX4" y="connsiteY4"/>
+                <a:pos x="csX4" y="csY4"/>
               </a:cxn>
               <a:cxn ang="0">
-                <a:pos x="connsiteX5" y="connsiteY5"/>
+                <a:pos x="csX5" y="csY5"/>
               </a:cxn>
               <a:cxn ang="0">
-                <a:pos x="connsiteX6" y="connsiteY6"/>
+                <a:pos x="csX6" y="csY6"/>
               </a:cxn>
               <a:cxn ang="0">
-                <a:pos x="connsiteX7" y="connsiteY7"/>
+                <a:pos x="csX7" y="csY7"/>
               </a:cxn>
               <a:cxn ang="0">
-                <a:pos x="connsiteX8" y="connsiteY8"/>
+                <a:pos x="csX8" y="csY8"/>
               </a:cxn>
               <a:cxn ang="0">
-                <a:pos x="connsiteX9" y="connsiteY9"/>
+                <a:pos x="csX9" y="csY9"/>
               </a:cxn>
               <a:cxn ang="0">
-                <a:pos x="connsiteX10" y="connsiteY10"/>
+                <a:pos x="csX10" y="csY10"/>
               </a:cxn>
               <a:cxn ang="0">
-                <a:pos x="connsiteX11" y="connsiteY11"/>
+                <a:pos x="csX11" y="csY11"/>
               </a:cxn>
               <a:cxn ang="0">
-                <a:pos x="connsiteX12" y="connsiteY12"/>
+                <a:pos x="csX12" y="csY12"/>
               </a:cxn>
               <a:cxn ang="0">
-                <a:pos x="connsiteX13" y="connsiteY13"/>
+                <a:pos x="csX13" y="csY13"/>
               </a:cxn>
               <a:cxn ang="0">
-                <a:pos x="connsiteX14" y="connsiteY14"/>
+                <a:pos x="csX14" y="csY14"/>
               </a:cxn>
               <a:cxn ang="0">
-                <a:pos x="connsiteX15" y="connsiteY15"/>
+                <a:pos x="csX15" y="csY15"/>
               </a:cxn>
               <a:cxn ang="0">
-                <a:pos x="connsiteX16" y="connsiteY16"/>
+                <a:pos x="csX16" y="csY16"/>
               </a:cxn>
               <a:cxn ang="0">
-                <a:pos x="connsiteX17" y="connsiteY17"/>
+                <a:pos x="csX17" y="csY17"/>
               </a:cxn>
               <a:cxn ang="0">
-                <a:pos x="connsiteX18" y="connsiteY18"/>
+                <a:pos x="csX18" y="csY18"/>
               </a:cxn>
               <a:cxn ang="0">
-                <a:pos x="connsiteX19" y="connsiteY19"/>
+                <a:pos x="csX19" y="csY19"/>
               </a:cxn>
               <a:cxn ang="0">
-                <a:pos x="connsiteX20" y="connsiteY20"/>
+                <a:pos x="csX20" y="csY20"/>
               </a:cxn>
               <a:cxn ang="0">
-                <a:pos x="connsiteX21" y="connsiteY21"/>
+                <a:pos x="csX21" y="csY21"/>
               </a:cxn>
               <a:cxn ang="0">
-                <a:pos x="connsiteX22" y="connsiteY22"/>
+                <a:pos x="csX22" y="csY22"/>
               </a:cxn>
               <a:cxn ang="0">
-                <a:pos x="connsiteX23" y="connsiteY23"/>
+                <a:pos x="csX23" y="csY23"/>
               </a:cxn>
               <a:cxn ang="0">
-                <a:pos x="connsiteX24" y="connsiteY24"/>
+                <a:pos x="csX24" y="csY24"/>
               </a:cxn>
               <a:cxn ang="0">
-                <a:pos x="connsiteX25" y="connsiteY25"/>
+                <a:pos x="csX25" y="csY25"/>
               </a:cxn>
               <a:cxn ang="0">
-                <a:pos x="connsiteX26" y="connsiteY26"/>
+                <a:pos x="csX26" y="csY26"/>
               </a:cxn>
               <a:cxn ang="0">
-                <a:pos x="connsiteX27" y="connsiteY27"/>
+                <a:pos x="csX27" y="csY27"/>
               </a:cxn>
               <a:cxn ang="0">
-                <a:pos x="connsiteX28" y="connsiteY28"/>
+                <a:pos x="csX28" y="csY28"/>
               </a:cxn>
               <a:cxn ang="0">
-                <a:pos x="connsiteX29" y="connsiteY29"/>
+                <a:pos x="csX29" y="csY29"/>
               </a:cxn>
               <a:cxn ang="0">
-                <a:pos x="connsiteX30" y="connsiteY30"/>
+                <a:pos x="csX30" y="csY30"/>
               </a:cxn>
               <a:cxn ang="0">
-                <a:pos x="connsiteX31" y="connsiteY31"/>
+                <a:pos x="csX31" y="csY31"/>
               </a:cxn>
               <a:cxn ang="0">
-                <a:pos x="connsiteX32" y="connsiteY32"/>
+                <a:pos x="csX32" y="csY32"/>
               </a:cxn>
               <a:cxn ang="0">
-                <a:pos x="connsiteX33" y="connsiteY33"/>
+                <a:pos x="csX33" y="csY33"/>
               </a:cxn>
               <a:cxn ang="0">
-                <a:pos x="connsiteX34" y="connsiteY34"/>
+                <a:pos x="csX34" y="csY34"/>
               </a:cxn>
               <a:cxn ang="0">
-                <a:pos x="connsiteX35" y="connsiteY35"/>
+                <a:pos x="csX35" y="csY35"/>
               </a:cxn>
               <a:cxn ang="0">
-                <a:pos x="connsiteX36" y="connsiteY36"/>
+                <a:pos x="csX36" y="csY36"/>
               </a:cxn>
               <a:cxn ang="0">
-                <a:pos x="connsiteX37" y="connsiteY37"/>
+                <a:pos x="csX37" y="csY37"/>
               </a:cxn>
             </a:cxnLst>
             <a:rect l="l" t="t" r="r" b="b"/>
@@ -6948,7 +7364,7 @@
       </p:sp>
       <p:pic>
         <p:nvPicPr>
-          <p:cNvPr id="7" name="Picture 6" descr="Sophie Wilson pointing at a large poster of the circuit lauour of an ARM processor.">
+          <p:cNvPr id="7" name="Picture 6" descr="Sophie Wilson pointing at a large poster of the circuit lauout of an ARM processor.">
             <a:extLst>
               <a:ext uri="{FF2B5EF4-FFF2-40B4-BE49-F238E27FC236}">
                 <a16:creationId xmlns:a16="http://schemas.microsoft.com/office/drawing/2014/main" id="{9DA2D4B2-A5F1-AFD9-CA44-DFEA761DC39C}"/>
@@ -6961,7 +7377,7 @@
           <p:nvPr/>
         </p:nvPicPr>
         <p:blipFill>
-          <a:blip r:embed="rId2"/>
+          <a:blip r:embed="rId3"/>
           <a:srcRect l="21351" r="4" b="4"/>
           <a:stretch>
             <a:fillRect/>
@@ -6977,59 +7393,6 @@
           </a:prstGeom>
         </p:spPr>
       </p:pic>
-      <p:sp>
-        <p:nvSpPr>
-          <p:cNvPr id="9" name="TextBox 8">
-            <a:extLst>
-              <a:ext uri="{FF2B5EF4-FFF2-40B4-BE49-F238E27FC236}">
-                <a16:creationId xmlns:a16="http://schemas.microsoft.com/office/drawing/2014/main" id="{D4A87130-7E5E-0231-6AD5-CC0684B8CAA1}"/>
-              </a:ext>
-            </a:extLst>
-          </p:cNvPr>
-          <p:cNvSpPr txBox="1"/>
-          <p:nvPr/>
-        </p:nvSpPr>
-        <p:spPr>
-          <a:xfrm>
-            <a:off x="5793983" y="233458"/>
-            <a:ext cx="6096000" cy="369332"/>
-          </a:xfrm>
-          <a:prstGeom prst="rect">
-            <a:avLst/>
-          </a:prstGeom>
-          <a:noFill/>
-        </p:spPr>
-        <p:txBody>
-          <a:bodyPr wrap="square">
-            <a:spAutoFit/>
-          </a:bodyPr>
-          <a:lstStyle/>
-          <a:p>
-            <a:pPr algn="r">
-              <a:spcAft>
-                <a:spcPts val="600"/>
-              </a:spcAft>
-            </a:pPr>
-            <a:r>
-              <a:rPr lang="en-US" dirty="0"/>
-              <a:t>https://</a:t>
-            </a:r>
-            <a:r>
-              <a:rPr lang="en-US" dirty="0" err="1"/>
-              <a:t>en.wikipedia.org</a:t>
-            </a:r>
-            <a:r>
-              <a:rPr lang="en-US" dirty="0"/>
-              <a:t>/wiki/</a:t>
-            </a:r>
-            <a:r>
-              <a:rPr lang="en-US" dirty="0" err="1"/>
-              <a:t>Sophie_Wilson</a:t>
-            </a:r>
-            <a:endParaRPr lang="en-US" dirty="0"/>
-          </a:p>
-        </p:txBody>
-      </p:sp>
       <p:sp>
         <p:nvSpPr>
           <p:cNvPr id="5" name="TextBox 4">
@@ -7488,9 +7851,224 @@
           <a:chExt cx="0" cy="0"/>
         </a:xfrm>
       </p:grpSpPr>
+      <p:sp>
+        <p:nvSpPr>
+          <p:cNvPr id="2" name="Title 1">
+            <a:extLst>
+              <a:ext uri="{FF2B5EF4-FFF2-40B4-BE49-F238E27FC236}">
+                <a16:creationId xmlns:a16="http://schemas.microsoft.com/office/drawing/2014/main" id="{2DAFB0D2-0AAA-8783-A423-B7BEA25D6225}"/>
+              </a:ext>
+            </a:extLst>
+          </p:cNvPr>
+          <p:cNvSpPr>
+            <a:spLocks noGrp="1"/>
+          </p:cNvSpPr>
+          <p:nvPr>
+            <p:ph type="title"/>
+          </p:nvPr>
+        </p:nvSpPr>
+        <p:spPr>
+          <a:xfrm>
+            <a:off x="838200" y="365125"/>
+            <a:ext cx="2761034" cy="1325563"/>
+          </a:xfrm>
+        </p:spPr>
+        <p:txBody>
+          <a:bodyPr/>
+          <a:lstStyle/>
+          <a:p>
+            <a:r>
+              <a:rPr lang="en-US" dirty="0"/>
+              <a:t>Uppercase a String</a:t>
+            </a:r>
+          </a:p>
+        </p:txBody>
+      </p:sp>
+      <p:sp>
+        <p:nvSpPr>
+          <p:cNvPr id="8" name="TextBox 7">
+            <a:extLst>
+              <a:ext uri="{FF2B5EF4-FFF2-40B4-BE49-F238E27FC236}">
+                <a16:creationId xmlns:a16="http://schemas.microsoft.com/office/drawing/2014/main" id="{973CB3E3-E0A1-9058-5801-8FB3ECE65C18}"/>
+              </a:ext>
+            </a:extLst>
+          </p:cNvPr>
+          <p:cNvSpPr txBox="1"/>
+          <p:nvPr/>
+        </p:nvSpPr>
+        <p:spPr>
+          <a:xfrm>
+            <a:off x="959710" y="1690688"/>
+            <a:ext cx="2048533" cy="4247317"/>
+          </a:xfrm>
+          <a:prstGeom prst="rect">
+            <a:avLst/>
+          </a:prstGeom>
+          <a:noFill/>
+        </p:spPr>
+        <p:txBody>
+          <a:bodyPr wrap="square">
+            <a:spAutoFit/>
+          </a:bodyPr>
+          <a:lstStyle/>
+          <a:p>
+            <a:r>
+              <a:rPr lang="en-US" b="1" dirty="0">
+                <a:effectLst/>
+                <a:latin typeface="Courier New" panose="02070309020205020404" pitchFamily="49" charset="0"/>
+              </a:rPr>
+              <a:t>CLX            </a:t>
+            </a:r>
+          </a:p>
+          <a:p>
+            <a:r>
+              <a:rPr lang="en-US" b="1" dirty="0">
+                <a:effectLst/>
+                <a:latin typeface="Courier New" panose="02070309020205020404" pitchFamily="49" charset="0"/>
+              </a:rPr>
+              <a:t>loop:</a:t>
+            </a:r>
+          </a:p>
+          <a:p>
+            <a:r>
+              <a:rPr lang="en-US" b="1" dirty="0">
+                <a:effectLst/>
+                <a:latin typeface="Courier New" panose="02070309020205020404" pitchFamily="49" charset="0"/>
+              </a:rPr>
+              <a:t>LDA $00,X</a:t>
+            </a:r>
+          </a:p>
+          <a:p>
+            <a:r>
+              <a:rPr lang="en-US" b="1" dirty="0">
+                <a:effectLst/>
+                <a:latin typeface="Courier New" panose="02070309020205020404" pitchFamily="49" charset="0"/>
+              </a:rPr>
+              <a:t>BEQ done       </a:t>
+            </a:r>
+          </a:p>
+          <a:p>
+            <a:r>
+              <a:rPr lang="en-US" b="1" dirty="0">
+                <a:effectLst/>
+                <a:latin typeface="Courier New" panose="02070309020205020404" pitchFamily="49" charset="0"/>
+              </a:rPr>
+              <a:t>CMP #'a'</a:t>
+            </a:r>
+          </a:p>
+          <a:p>
+            <a:r>
+              <a:rPr lang="en-US" b="1" dirty="0">
+                <a:effectLst/>
+                <a:latin typeface="Courier New" panose="02070309020205020404" pitchFamily="49" charset="0"/>
+              </a:rPr>
+              <a:t>BMI </a:t>
+            </a:r>
+            <a:r>
+              <a:rPr lang="en-US" b="1" dirty="0" err="1">
+                <a:effectLst/>
+                <a:latin typeface="Courier New" panose="02070309020205020404" pitchFamily="49" charset="0"/>
+              </a:rPr>
+              <a:t>cont</a:t>
+            </a:r>
+            <a:endParaRPr lang="en-US" b="1" dirty="0">
+              <a:effectLst/>
+              <a:latin typeface="Courier New" panose="02070309020205020404" pitchFamily="49" charset="0"/>
+            </a:endParaRPr>
+          </a:p>
+          <a:p>
+            <a:r>
+              <a:rPr lang="en-US" b="1" dirty="0">
+                <a:effectLst/>
+                <a:latin typeface="Courier New" panose="02070309020205020404" pitchFamily="49" charset="0"/>
+              </a:rPr>
+              <a:t>SBC #0x20</a:t>
+            </a:r>
+          </a:p>
+          <a:p>
+            <a:r>
+              <a:rPr lang="en-US" b="1" dirty="0">
+                <a:effectLst/>
+                <a:latin typeface="Courier New" panose="02070309020205020404" pitchFamily="49" charset="0"/>
+              </a:rPr>
+              <a:t>STA $00,X </a:t>
+            </a:r>
+          </a:p>
+          <a:p>
+            <a:r>
+              <a:rPr lang="en-US" b="1" dirty="0" err="1">
+                <a:effectLst/>
+                <a:latin typeface="Courier New" panose="02070309020205020404" pitchFamily="49" charset="0"/>
+              </a:rPr>
+              <a:t>cont</a:t>
+            </a:r>
+            <a:r>
+              <a:rPr lang="en-US" b="1" dirty="0">
+                <a:effectLst/>
+                <a:latin typeface="Courier New" panose="02070309020205020404" pitchFamily="49" charset="0"/>
+              </a:rPr>
+              <a:t>:</a:t>
+            </a:r>
+          </a:p>
+          <a:p>
+            <a:r>
+              <a:rPr lang="en-US" b="1" dirty="0">
+                <a:effectLst/>
+                <a:latin typeface="Courier New" panose="02070309020205020404" pitchFamily="49" charset="0"/>
+              </a:rPr>
+              <a:t>INX            </a:t>
+            </a:r>
+          </a:p>
+          <a:p>
+            <a:r>
+              <a:rPr lang="en-US" b="1" dirty="0">
+                <a:effectLst/>
+                <a:latin typeface="Courier New" panose="02070309020205020404" pitchFamily="49" charset="0"/>
+              </a:rPr>
+              <a:t>JMP loop</a:t>
+            </a:r>
+          </a:p>
+          <a:p>
+            <a:r>
+              <a:rPr lang="en-US" b="1" dirty="0">
+                <a:effectLst/>
+                <a:latin typeface="Courier New" panose="02070309020205020404" pitchFamily="49" charset="0"/>
+              </a:rPr>
+              <a:t>done:</a:t>
+            </a:r>
+          </a:p>
+          <a:p>
+            <a:r>
+              <a:rPr lang="en-US" b="1" dirty="0">
+                <a:effectLst/>
+                <a:latin typeface="Courier New" panose="02070309020205020404" pitchFamily="49" charset="0"/>
+              </a:rPr>
+              <a:t>BRK</a:t>
+            </a:r>
+          </a:p>
+          <a:p>
+            <a:endParaRPr lang="en-US" b="1" dirty="0">
+              <a:effectLst/>
+              <a:latin typeface="Courier New" panose="02070309020205020404" pitchFamily="49" charset="0"/>
+            </a:endParaRPr>
+          </a:p>
+          <a:p>
+            <a:r>
+              <a:rPr lang="en-US" b="1" dirty="0">
+                <a:solidFill>
+                  <a:srgbClr val="00B050"/>
+                </a:solidFill>
+                <a:effectLst/>
+                <a:latin typeface="Courier New" panose="02070309020205020404" pitchFamily="49" charset="0"/>
+              </a:rPr>
+              <a:t>DATA 'Hello'</a:t>
+            </a:r>
+          </a:p>
+        </p:txBody>
+      </p:sp>
       <p:pic>
         <p:nvPicPr>
-          <p:cNvPr id="7" name="Picture 6" descr="A screenshot of a computer program&#10;&#10;AI-generated content may be incorrect.">
+          <p:cNvPr id="7" name="Picture 6" descr="A screen shot of the CDC 6504 emulator after loading rhe “Upper Case String” example.  It has not yet started.">
             <a:extLst>
               <a:ext uri="{FF2B5EF4-FFF2-40B4-BE49-F238E27FC236}">
                 <a16:creationId xmlns:a16="http://schemas.microsoft.com/office/drawing/2014/main" id="{61E24CF6-30FF-46D8-D806-9F09CE3F0599}"/>
@@ -7523,221 +8101,6 @@
           </a:ln>
         </p:spPr>
       </p:pic>
-      <p:sp>
-        <p:nvSpPr>
-          <p:cNvPr id="2" name="Title 1">
-            <a:extLst>
-              <a:ext uri="{FF2B5EF4-FFF2-40B4-BE49-F238E27FC236}">
-                <a16:creationId xmlns:a16="http://schemas.microsoft.com/office/drawing/2014/main" id="{2DAFB0D2-0AAA-8783-A423-B7BEA25D6225}"/>
-              </a:ext>
-            </a:extLst>
-          </p:cNvPr>
-          <p:cNvSpPr>
-            <a:spLocks noGrp="1"/>
-          </p:cNvSpPr>
-          <p:nvPr>
-            <p:ph type="title"/>
-          </p:nvPr>
-        </p:nvSpPr>
-        <p:spPr>
-          <a:xfrm>
-            <a:off x="838200" y="365125"/>
-            <a:ext cx="2761034" cy="1325563"/>
-          </a:xfrm>
-        </p:spPr>
-        <p:txBody>
-          <a:bodyPr/>
-          <a:lstStyle/>
-          <a:p>
-            <a:r>
-              <a:rPr lang="en-US" dirty="0"/>
-              <a:t>Uppercase a String</a:t>
-            </a:r>
-          </a:p>
-        </p:txBody>
-      </p:sp>
-      <p:sp>
-        <p:nvSpPr>
-          <p:cNvPr id="8" name="TextBox 7">
-            <a:extLst>
-              <a:ext uri="{FF2B5EF4-FFF2-40B4-BE49-F238E27FC236}">
-                <a16:creationId xmlns:a16="http://schemas.microsoft.com/office/drawing/2014/main" id="{973CB3E3-E0A1-9058-5801-8FB3ECE65C18}"/>
-              </a:ext>
-            </a:extLst>
-          </p:cNvPr>
-          <p:cNvSpPr txBox="1"/>
-          <p:nvPr/>
-        </p:nvSpPr>
-        <p:spPr>
-          <a:xfrm>
-            <a:off x="959710" y="1690688"/>
-            <a:ext cx="2048533" cy="4247317"/>
-          </a:xfrm>
-          <a:prstGeom prst="rect">
-            <a:avLst/>
-          </a:prstGeom>
-          <a:noFill/>
-        </p:spPr>
-        <p:txBody>
-          <a:bodyPr wrap="square">
-            <a:spAutoFit/>
-          </a:bodyPr>
-          <a:lstStyle/>
-          <a:p>
-            <a:r>
-              <a:rPr lang="en-US" b="1" dirty="0">
-                <a:effectLst/>
-                <a:latin typeface="Courier New" panose="02070309020205020404" pitchFamily="49" charset="0"/>
-              </a:rPr>
-              <a:t>CLX            </a:t>
-            </a:r>
-          </a:p>
-          <a:p>
-            <a:r>
-              <a:rPr lang="en-US" b="1" dirty="0">
-                <a:effectLst/>
-                <a:latin typeface="Courier New" panose="02070309020205020404" pitchFamily="49" charset="0"/>
-              </a:rPr>
-              <a:t>loop:</a:t>
-            </a:r>
-          </a:p>
-          <a:p>
-            <a:r>
-              <a:rPr lang="en-US" b="1" dirty="0">
-                <a:effectLst/>
-                <a:latin typeface="Courier New" panose="02070309020205020404" pitchFamily="49" charset="0"/>
-              </a:rPr>
-              <a:t>LDA $00,X</a:t>
-            </a:r>
-          </a:p>
-          <a:p>
-            <a:r>
-              <a:rPr lang="en-US" b="1" dirty="0">
-                <a:effectLst/>
-                <a:latin typeface="Courier New" panose="02070309020205020404" pitchFamily="49" charset="0"/>
-              </a:rPr>
-              <a:t>BEQ done       </a:t>
-            </a:r>
-          </a:p>
-          <a:p>
-            <a:r>
-              <a:rPr lang="en-US" b="1" dirty="0">
-                <a:effectLst/>
-                <a:latin typeface="Courier New" panose="02070309020205020404" pitchFamily="49" charset="0"/>
-              </a:rPr>
-              <a:t>CMP #'a'</a:t>
-            </a:r>
-          </a:p>
-          <a:p>
-            <a:r>
-              <a:rPr lang="en-US" b="1" dirty="0">
-                <a:effectLst/>
-                <a:latin typeface="Courier New" panose="02070309020205020404" pitchFamily="49" charset="0"/>
-              </a:rPr>
-              <a:t>BMI </a:t>
-            </a:r>
-            <a:r>
-              <a:rPr lang="en-US" b="1" dirty="0" err="1">
-                <a:effectLst/>
-                <a:latin typeface="Courier New" panose="02070309020205020404" pitchFamily="49" charset="0"/>
-              </a:rPr>
-              <a:t>cont</a:t>
-            </a:r>
-            <a:endParaRPr lang="en-US" b="1" dirty="0">
-              <a:effectLst/>
-              <a:latin typeface="Courier New" panose="02070309020205020404" pitchFamily="49" charset="0"/>
-            </a:endParaRPr>
-          </a:p>
-          <a:p>
-            <a:r>
-              <a:rPr lang="en-US" b="1" dirty="0">
-                <a:effectLst/>
-                <a:latin typeface="Courier New" panose="02070309020205020404" pitchFamily="49" charset="0"/>
-              </a:rPr>
-              <a:t>SBC #0x20</a:t>
-            </a:r>
-          </a:p>
-          <a:p>
-            <a:r>
-              <a:rPr lang="en-US" b="1" dirty="0">
-                <a:effectLst/>
-                <a:latin typeface="Courier New" panose="02070309020205020404" pitchFamily="49" charset="0"/>
-              </a:rPr>
-              <a:t>STA $00,X </a:t>
-            </a:r>
-          </a:p>
-          <a:p>
-            <a:r>
-              <a:rPr lang="en-US" b="1" dirty="0" err="1">
-                <a:effectLst/>
-                <a:latin typeface="Courier New" panose="02070309020205020404" pitchFamily="49" charset="0"/>
-              </a:rPr>
-              <a:t>cont</a:t>
-            </a:r>
-            <a:r>
-              <a:rPr lang="en-US" b="1" dirty="0">
-                <a:effectLst/>
-                <a:latin typeface="Courier New" panose="02070309020205020404" pitchFamily="49" charset="0"/>
-              </a:rPr>
-              <a:t>:</a:t>
-            </a:r>
-          </a:p>
-          <a:p>
-            <a:r>
-              <a:rPr lang="en-US" b="1" dirty="0">
-                <a:effectLst/>
-                <a:latin typeface="Courier New" panose="02070309020205020404" pitchFamily="49" charset="0"/>
-              </a:rPr>
-              <a:t>INX            </a:t>
-            </a:r>
-          </a:p>
-          <a:p>
-            <a:r>
-              <a:rPr lang="en-US" b="1" dirty="0">
-                <a:effectLst/>
-                <a:latin typeface="Courier New" panose="02070309020205020404" pitchFamily="49" charset="0"/>
-              </a:rPr>
-              <a:t>JMP loop</a:t>
-            </a:r>
-          </a:p>
-          <a:p>
-            <a:r>
-              <a:rPr lang="en-US" b="1" dirty="0">
-                <a:effectLst/>
-                <a:latin typeface="Courier New" panose="02070309020205020404" pitchFamily="49" charset="0"/>
-              </a:rPr>
-              <a:t>done:</a:t>
-            </a:r>
-          </a:p>
-          <a:p>
-            <a:r>
-              <a:rPr lang="en-US" b="1" dirty="0">
-                <a:effectLst/>
-                <a:latin typeface="Courier New" panose="02070309020205020404" pitchFamily="49" charset="0"/>
-              </a:rPr>
-              <a:t>BRK</a:t>
-            </a:r>
-          </a:p>
-          <a:p>
-            <a:endParaRPr lang="en-US" b="1" dirty="0">
-              <a:effectLst/>
-              <a:latin typeface="Courier New" panose="02070309020205020404" pitchFamily="49" charset="0"/>
-            </a:endParaRPr>
-          </a:p>
-          <a:p>
-            <a:r>
-              <a:rPr lang="en-US" b="1" dirty="0">
-                <a:solidFill>
-                  <a:srgbClr val="00B050"/>
-                </a:solidFill>
-                <a:effectLst/>
-                <a:latin typeface="Courier New" panose="02070309020205020404" pitchFamily="49" charset="0"/>
-              </a:rPr>
-              <a:t>DATA 'Hello'</a:t>
-            </a:r>
-          </a:p>
-        </p:txBody>
-      </p:sp>
     </p:spTree>
     <p:extLst>
       <p:ext uri="{BB962C8B-B14F-4D97-AF65-F5344CB8AC3E}">
@@ -7770,6 +8133,41 @@
       </p:grpSpPr>
       <p:sp>
         <p:nvSpPr>
+          <p:cNvPr id="2" name="Title 1">
+            <a:extLst>
+              <a:ext uri="{FF2B5EF4-FFF2-40B4-BE49-F238E27FC236}">
+                <a16:creationId xmlns:a16="http://schemas.microsoft.com/office/drawing/2014/main" id="{4748BEA6-9D02-F1FD-C531-52456DA8BAF9}"/>
+              </a:ext>
+            </a:extLst>
+          </p:cNvPr>
+          <p:cNvSpPr>
+            <a:spLocks noGrp="1"/>
+          </p:cNvSpPr>
+          <p:nvPr>
+            <p:ph type="title" idx="4294967295"/>
+          </p:nvPr>
+        </p:nvSpPr>
+        <p:spPr>
+          <a:xfrm>
+            <a:off x="838200" y="-1325563"/>
+            <a:ext cx="10515600" cy="1325563"/>
+          </a:xfrm>
+        </p:spPr>
+        <p:txBody>
+          <a:bodyPr vert="horz" lIns="91440" tIns="45720" rIns="91440" bIns="45720" rtlCol="0" anchor="b">
+            <a:normAutofit/>
+          </a:bodyPr>
+          <a:lstStyle/>
+          <a:p>
+            <a:r>
+              <a:rPr lang="en-US" dirty="0"/>
+              <a:t>Looking at the CDC6504 Emulator code…</a:t>
+            </a:r>
+          </a:p>
+        </p:txBody>
+      </p:sp>
+      <p:sp>
+        <p:nvSpPr>
           <p:cNvPr id="5" name="TextBox 4">
             <a:extLst>
               <a:ext uri="{FF2B5EF4-FFF2-40B4-BE49-F238E27FC236}">
@@ -8131,49 +8529,9 @@
           </a:p>
         </p:txBody>
       </p:sp>
-      <p:sp>
-        <p:nvSpPr>
-          <p:cNvPr id="6" name="TextBox 5">
-            <a:extLst>
-              <a:ext uri="{FF2B5EF4-FFF2-40B4-BE49-F238E27FC236}">
-                <a16:creationId xmlns:a16="http://schemas.microsoft.com/office/drawing/2014/main" id="{1A1A7F8B-2DD0-F777-82ED-208CA00AC228}"/>
-              </a:ext>
-            </a:extLst>
-          </p:cNvPr>
-          <p:cNvSpPr txBox="1"/>
-          <p:nvPr/>
-        </p:nvSpPr>
-        <p:spPr>
-          <a:xfrm>
-            <a:off x="6296628" y="112991"/>
-            <a:ext cx="5304081" cy="369332"/>
-          </a:xfrm>
-          <a:prstGeom prst="rect">
-            <a:avLst/>
-          </a:prstGeom>
-          <a:noFill/>
-        </p:spPr>
-        <p:txBody>
-          <a:bodyPr wrap="none" rtlCol="0">
-            <a:spAutoFit/>
-          </a:bodyPr>
-          <a:lstStyle/>
-          <a:p>
-            <a:r>
-              <a:rPr lang="en-US" dirty="0"/>
-              <a:t>https://www.ca4e.com/tools/cdc6504/</a:t>
-            </a:r>
-            <a:r>
-              <a:rPr lang="en-US" dirty="0" err="1"/>
-              <a:t>cpu-emulator.js</a:t>
-            </a:r>
-            <a:endParaRPr lang="en-US" dirty="0"/>
-          </a:p>
-        </p:txBody>
-      </p:sp>
       <p:pic>
         <p:nvPicPr>
-          <p:cNvPr id="7" name="Picture 6" descr="A screenshot of a computer&#10;&#10;AI-generated content may be incorrect.">
+          <p:cNvPr id="7" name="Picture 6" descr="A screen shot of the CDC6504 Emulator halted after the program to add 27 + 15 and print out asterisk (ASCII code 42).">
             <a:extLst>
               <a:ext uri="{FF2B5EF4-FFF2-40B4-BE49-F238E27FC236}">
                 <a16:creationId xmlns:a16="http://schemas.microsoft.com/office/drawing/2014/main" id="{C8DD4426-5AC1-6024-E988-65D2BBA1CD8A}"/>
@@ -8186,7 +8544,7 @@
           <p:nvPr/>
         </p:nvPicPr>
         <p:blipFill>
-          <a:blip r:embed="rId2"/>
+          <a:blip r:embed="rId3"/>
           <a:stretch>
             <a:fillRect/>
           </a:stretch>
@@ -8238,6 +8596,46 @@
       </p:grpSpPr>
       <p:sp>
         <p:nvSpPr>
+          <p:cNvPr id="2" name="Title 1">
+            <a:extLst>
+              <a:ext uri="{FF2B5EF4-FFF2-40B4-BE49-F238E27FC236}">
+                <a16:creationId xmlns:a16="http://schemas.microsoft.com/office/drawing/2014/main" id="{E220FB32-2CFD-4E73-EAD5-C2DADF72FABE}"/>
+              </a:ext>
+            </a:extLst>
+          </p:cNvPr>
+          <p:cNvSpPr>
+            <a:spLocks noGrp="1"/>
+          </p:cNvSpPr>
+          <p:nvPr>
+            <p:ph type="title" idx="4294967295"/>
+          </p:nvPr>
+        </p:nvSpPr>
+        <p:spPr>
+          <a:xfrm>
+            <a:off x="838200" y="-1325563"/>
+            <a:ext cx="10515600" cy="1325563"/>
+          </a:xfrm>
+        </p:spPr>
+        <p:txBody>
+          <a:bodyPr vert="horz" lIns="91440" tIns="45720" rIns="91440" bIns="45720" rtlCol="0" anchor="b">
+            <a:normAutofit/>
+          </a:bodyPr>
+          <a:lstStyle/>
+          <a:p>
+            <a:r>
+              <a:rPr lang="en-US" dirty="0"/>
+              <a:t>https://www.ca4e.com/tools/cdc6504/</a:t>
+            </a:r>
+            <a:r>
+              <a:rPr lang="en-US" dirty="0" err="1"/>
+              <a:t>cpu-emulator.js</a:t>
+            </a:r>
+            <a:endParaRPr lang="en-US" dirty="0"/>
+          </a:p>
+        </p:txBody>
+      </p:sp>
+      <p:sp>
+        <p:nvSpPr>
           <p:cNvPr id="3" name="TextBox 2">
             <a:extLst>
               <a:ext uri="{FF2B5EF4-FFF2-40B4-BE49-F238E27FC236}">
@@ -8825,46 +9223,6 @@
               </a:rPr>
               <a:t>}</a:t>
             </a:r>
-          </a:p>
-        </p:txBody>
-      </p:sp>
-      <p:sp>
-        <p:nvSpPr>
-          <p:cNvPr id="4" name="TextBox 3">
-            <a:extLst>
-              <a:ext uri="{FF2B5EF4-FFF2-40B4-BE49-F238E27FC236}">
-                <a16:creationId xmlns:a16="http://schemas.microsoft.com/office/drawing/2014/main" id="{482A13E2-C328-027C-4331-FF9A448EC637}"/>
-              </a:ext>
-            </a:extLst>
-          </p:cNvPr>
-          <p:cNvSpPr txBox="1"/>
-          <p:nvPr/>
-        </p:nvSpPr>
-        <p:spPr>
-          <a:xfrm>
-            <a:off x="6296628" y="112991"/>
-            <a:ext cx="5304081" cy="369332"/>
-          </a:xfrm>
-          <a:prstGeom prst="rect">
-            <a:avLst/>
-          </a:prstGeom>
-          <a:noFill/>
-        </p:spPr>
-        <p:txBody>
-          <a:bodyPr wrap="none" rtlCol="0">
-            <a:spAutoFit/>
-          </a:bodyPr>
-          <a:lstStyle/>
-          <a:p>
-            <a:r>
-              <a:rPr lang="en-US" dirty="0"/>
-              <a:t>https://www.ca4e.com/tools/cdc6504/</a:t>
-            </a:r>
-            <a:r>
-              <a:rPr lang="en-US" dirty="0" err="1"/>
-              <a:t>cpu-emulator.js</a:t>
-            </a:r>
-            <a:endParaRPr lang="en-US" dirty="0"/>
           </a:p>
         </p:txBody>
       </p:sp>
@@ -9053,7 +9411,7 @@
       </p:sp>
       <p:pic>
         <p:nvPicPr>
-          <p:cNvPr id="4" name="Picture 3" descr="A screenshot of a video game&#10;&#10;AI-generated content may be incorrect.">
+          <p:cNvPr id="4" name="Picture 3" descr="A screen shot of the archive.org page for the Atari 2600.">
             <a:extLst>
               <a:ext uri="{FF2B5EF4-FFF2-40B4-BE49-F238E27FC236}">
                 <a16:creationId xmlns:a16="http://schemas.microsoft.com/office/drawing/2014/main" id="{FEE51615-07FE-E575-5A5E-4C76E9DBA311}"/>
@@ -9150,12 +9508,86 @@
           </a:p>
         </p:txBody>
       </p:sp>
+      <p:pic>
+        <p:nvPicPr>
+          <p:cNvPr id="3" name="Picture 2" descr="A  Atari 2600 console">
+            <a:extLst>
+              <a:ext uri="{FF2B5EF4-FFF2-40B4-BE49-F238E27FC236}">
+                <a16:creationId xmlns:a16="http://schemas.microsoft.com/office/drawing/2014/main" id="{6BE19E7E-FADC-D225-B254-82239BB8D3BA}"/>
+              </a:ext>
+            </a:extLst>
+          </p:cNvPr>
+          <p:cNvPicPr>
+            <a:picLocks noChangeAspect="1"/>
+          </p:cNvPicPr>
+          <p:nvPr/>
+        </p:nvPicPr>
+        <p:blipFill>
+          <a:blip r:embed="rId3" cstate="print">
+            <a:extLst>
+              <a:ext uri="{28A0092B-C50C-407E-A947-70E740481C1C}">
+                <a14:useLocalDpi xmlns:a14="http://schemas.microsoft.com/office/drawing/2010/main"/>
+              </a:ext>
+            </a:extLst>
+          </a:blip>
+          <a:stretch>
+            <a:fillRect/>
+          </a:stretch>
+        </p:blipFill>
+        <p:spPr>
+          <a:xfrm>
+            <a:off x="395013" y="2396849"/>
+            <a:ext cx="3434975" cy="2097660"/>
+          </a:xfrm>
+          <a:prstGeom prst="rect">
+            <a:avLst/>
+          </a:prstGeom>
+        </p:spPr>
+      </p:pic>
+      <p:sp>
+        <p:nvSpPr>
+          <p:cNvPr id="4" name="TextBox 3">
+            <a:extLst>
+              <a:ext uri="{FF2B5EF4-FFF2-40B4-BE49-F238E27FC236}">
+                <a16:creationId xmlns:a16="http://schemas.microsoft.com/office/drawing/2014/main" id="{67893493-FE38-3E88-2DFA-91972C8C665C}"/>
+              </a:ext>
+            </a:extLst>
+          </p:cNvPr>
+          <p:cNvSpPr txBox="1"/>
+          <p:nvPr/>
+        </p:nvSpPr>
+        <p:spPr>
+          <a:xfrm>
+            <a:off x="840699" y="4813212"/>
+            <a:ext cx="3580275" cy="369332"/>
+          </a:xfrm>
+          <a:prstGeom prst="rect">
+            <a:avLst/>
+          </a:prstGeom>
+          <a:noFill/>
+        </p:spPr>
+        <p:txBody>
+          <a:bodyPr wrap="none" rtlCol="0">
+            <a:spAutoFit/>
+          </a:bodyPr>
+          <a:lstStyle/>
+          <a:p>
+            <a:r>
+              <a:rPr lang="en-US" dirty="0"/>
+              <a:t>The Atari 2600 has a 6502 processor.</a:t>
+            </a:r>
+          </a:p>
+        </p:txBody>
+      </p:sp>
       <p:sp>
         <p:nvSpPr>
           <p:cNvPr id="7" name="Right Arrow 6">
             <a:extLst>
               <a:ext uri="{FF2B5EF4-FFF2-40B4-BE49-F238E27FC236}">
                 <a16:creationId xmlns:a16="http://schemas.microsoft.com/office/drawing/2014/main" id="{FC835B87-D398-82E8-2351-15DE4AB9F222}"/>
+              </a:ext>
+              <a:ext uri="{C183D7F6-B498-43B3-948B-1728B52AA6E4}">
+                <adec:decorative xmlns:adec="http://schemas.microsoft.com/office/drawing/2017/decorative" val="1"/>
               </a:ext>
             </a:extLst>
           </p:cNvPr>
@@ -9198,43 +9630,7 @@
       </p:sp>
       <p:pic>
         <p:nvPicPr>
-          <p:cNvPr id="3" name="Picture 2" descr="A black and brown video game console&#10;&#10;AI-generated content may be incorrect.">
-            <a:extLst>
-              <a:ext uri="{FF2B5EF4-FFF2-40B4-BE49-F238E27FC236}">
-                <a16:creationId xmlns:a16="http://schemas.microsoft.com/office/drawing/2014/main" id="{6BE19E7E-FADC-D225-B254-82239BB8D3BA}"/>
-              </a:ext>
-            </a:extLst>
-          </p:cNvPr>
-          <p:cNvPicPr>
-            <a:picLocks noChangeAspect="1"/>
-          </p:cNvPicPr>
-          <p:nvPr/>
-        </p:nvPicPr>
-        <p:blipFill>
-          <a:blip r:embed="rId3" cstate="print">
-            <a:extLst>
-              <a:ext uri="{28A0092B-C50C-407E-A947-70E740481C1C}">
-                <a14:useLocalDpi xmlns:a14="http://schemas.microsoft.com/office/drawing/2010/main"/>
-              </a:ext>
-            </a:extLst>
-          </a:blip>
-          <a:stretch>
-            <a:fillRect/>
-          </a:stretch>
-        </p:blipFill>
-        <p:spPr>
-          <a:xfrm>
-            <a:off x="395013" y="2396849"/>
-            <a:ext cx="3434975" cy="2097660"/>
-          </a:xfrm>
-          <a:prstGeom prst="rect">
-            <a:avLst/>
-          </a:prstGeom>
-        </p:spPr>
-      </p:pic>
-      <p:pic>
-        <p:nvPicPr>
-          <p:cNvPr id="8" name="Picture 7" descr="A screenshot of a video game&#10;&#10;AI-generated content may be incorrect.">
+          <p:cNvPr id="8" name="Picture 7" descr="A screen shot of the Internat Archive running Atari 2600 Space Invaders">
             <a:hlinkClick r:id="rId4"/>
             <a:extLst>
               <a:ext uri="{FF2B5EF4-FFF2-40B4-BE49-F238E27FC236}">
@@ -9274,41 +9670,6 @@
           </a:ln>
         </p:spPr>
       </p:pic>
-      <p:sp>
-        <p:nvSpPr>
-          <p:cNvPr id="4" name="TextBox 3">
-            <a:extLst>
-              <a:ext uri="{FF2B5EF4-FFF2-40B4-BE49-F238E27FC236}">
-                <a16:creationId xmlns:a16="http://schemas.microsoft.com/office/drawing/2014/main" id="{67893493-FE38-3E88-2DFA-91972C8C665C}"/>
-              </a:ext>
-            </a:extLst>
-          </p:cNvPr>
-          <p:cNvSpPr txBox="1"/>
-          <p:nvPr/>
-        </p:nvSpPr>
-        <p:spPr>
-          <a:xfrm>
-            <a:off x="840699" y="4813212"/>
-            <a:ext cx="3580275" cy="369332"/>
-          </a:xfrm>
-          <a:prstGeom prst="rect">
-            <a:avLst/>
-          </a:prstGeom>
-          <a:noFill/>
-        </p:spPr>
-        <p:txBody>
-          <a:bodyPr wrap="none" rtlCol="0">
-            <a:spAutoFit/>
-          </a:bodyPr>
-          <a:lstStyle/>
-          <a:p>
-            <a:r>
-              <a:rPr lang="en-US" dirty="0"/>
-              <a:t>The Atari 2600 has a 6502 processor.</a:t>
-            </a:r>
-          </a:p>
-        </p:txBody>
-      </p:sp>
     </p:spTree>
     <p:extLst>
       <p:ext uri="{BB962C8B-B14F-4D97-AF65-F5344CB8AC3E}">
@@ -9369,10 +9730,10 @@
       </p:sp>
       <p:pic>
         <p:nvPicPr>
-          <p:cNvPr id="4" name="Picture 3" descr="A screenshot of a computer&#10;&#10;AI-generated content may be incorrect.">
-            <a:extLst>
-              <a:ext uri="{FF2B5EF4-FFF2-40B4-BE49-F238E27FC236}">
-                <a16:creationId xmlns:a16="http://schemas.microsoft.com/office/drawing/2014/main" id="{E9158D5F-5C43-CAC6-EE17-EA550BE8C3A4}"/>
+          <p:cNvPr id="10" name="Picture 9" descr="An Atari 2600 console.">
+            <a:extLst>
+              <a:ext uri="{FF2B5EF4-FFF2-40B4-BE49-F238E27FC236}">
+                <a16:creationId xmlns:a16="http://schemas.microsoft.com/office/drawing/2014/main" id="{624C88A2-49FB-3C90-025E-B2B2A13B0D40}"/>
               </a:ext>
             </a:extLst>
           </p:cNvPr>
@@ -9382,37 +9743,7 @@
           <p:nvPr/>
         </p:nvPicPr>
         <p:blipFill>
-          <a:blip r:embed="rId2"/>
-          <a:stretch>
-            <a:fillRect/>
-          </a:stretch>
-        </p:blipFill>
-        <p:spPr>
-          <a:xfrm>
-            <a:off x="4203081" y="1690688"/>
-            <a:ext cx="7772400" cy="4464995"/>
-          </a:xfrm>
-          <a:prstGeom prst="rect">
-            <a:avLst/>
-          </a:prstGeom>
-        </p:spPr>
-      </p:pic>
-      <p:pic>
-        <p:nvPicPr>
-          <p:cNvPr id="10" name="Picture 9" descr="A black and brown video game console&#10;&#10;AI-generated content may be incorrect.">
-            <a:extLst>
-              <a:ext uri="{FF2B5EF4-FFF2-40B4-BE49-F238E27FC236}">
-                <a16:creationId xmlns:a16="http://schemas.microsoft.com/office/drawing/2014/main" id="{624C88A2-49FB-3C90-025E-B2B2A13B0D40}"/>
-              </a:ext>
-            </a:extLst>
-          </p:cNvPr>
-          <p:cNvPicPr>
-            <a:picLocks noChangeAspect="1"/>
-          </p:cNvPicPr>
-          <p:nvPr/>
-        </p:nvPicPr>
-        <p:blipFill>
-          <a:blip r:embed="rId3" cstate="print">
+          <a:blip r:embed="rId2" cstate="print">
             <a:extLst>
               <a:ext uri="{28A0092B-C50C-407E-A947-70E740481C1C}">
                 <a14:useLocalDpi xmlns:a14="http://schemas.microsoft.com/office/drawing/2010/main"/>
@@ -9427,6 +9758,36 @@
           <a:xfrm>
             <a:off x="395013" y="2396849"/>
             <a:ext cx="3434975" cy="2097660"/>
+          </a:xfrm>
+          <a:prstGeom prst="rect">
+            <a:avLst/>
+          </a:prstGeom>
+        </p:spPr>
+      </p:pic>
+      <p:pic>
+        <p:nvPicPr>
+          <p:cNvPr id="4" name="Picture 3" descr="A screen shot of the Atari 2600 emulator using the MAME game emulation library and WASM.">
+            <a:extLst>
+              <a:ext uri="{FF2B5EF4-FFF2-40B4-BE49-F238E27FC236}">
+                <a16:creationId xmlns:a16="http://schemas.microsoft.com/office/drawing/2014/main" id="{E9158D5F-5C43-CAC6-EE17-EA550BE8C3A4}"/>
+              </a:ext>
+            </a:extLst>
+          </p:cNvPr>
+          <p:cNvPicPr>
+            <a:picLocks noChangeAspect="1"/>
+          </p:cNvPicPr>
+          <p:nvPr/>
+        </p:nvPicPr>
+        <p:blipFill>
+          <a:blip r:embed="rId3"/>
+          <a:stretch>
+            <a:fillRect/>
+          </a:stretch>
+        </p:blipFill>
+        <p:spPr>
+          <a:xfrm>
+            <a:off x="4203081" y="1690688"/>
+            <a:ext cx="7772400" cy="4464995"/>
           </a:xfrm>
           <a:prstGeom prst="rect">
             <a:avLst/>

--- a/lectures/07-Emulator.pptx
+++ b/lectures/07-Emulator.pptx
@@ -8056,7 +8056,9 @@
             <a:r>
               <a:rPr lang="en-US" b="1" dirty="0">
                 <a:solidFill>
-                  <a:srgbClr val="00B050"/>
+                  <a:schemeClr val="accent1">
+                    <a:lumMod val="50000"/>
+                  </a:schemeClr>
                 </a:solidFill>
                 <a:effectLst/>
                 <a:latin typeface="Courier New" panose="02070309020205020404" pitchFamily="49" charset="0"/>
